--- a/lecons/F4/56_F4_M2_L44_The_Management_of_Mineral_Resources_in_Cameroon.pptx
+++ b/lecons/F4/56_F4_M2_L44_The_Management_of_Mineral_Resources_in_Cameroon.pptx
@@ -13167,7 +13167,7 @@
         <p:spPr>
           <a:xfrm>
             <a:off x="0" y="658368"/>
-            <a:ext cx="3840480" cy="5833872"/>
+            <a:ext cx="5120640" cy="5833872"/>
           </a:xfrm>
           <a:prstGeom prst="rect">
             <a:avLst/>
@@ -13182,8 +13182,8 @@
         </p:nvSpPr>
         <p:spPr>
           <a:xfrm>
-            <a:off x="4069080" y="1005840"/>
-            <a:ext cx="7802575" cy="731520"/>
+            <a:off x="5349240" y="1005840"/>
+            <a:ext cx="6522415" cy="731520"/>
           </a:xfrm>
           <a:prstGeom prst="rect">
             <a:avLst/>
@@ -13223,8 +13223,8 @@
         </p:nvSpPr>
         <p:spPr>
           <a:xfrm>
-            <a:off x="4069080" y="1783080"/>
-            <a:ext cx="7802575" cy="4663440"/>
+            <a:off x="5349240" y="1783080"/>
+            <a:ext cx="6522415" cy="4663440"/>
           </a:xfrm>
           <a:prstGeom prst="rect">
             <a:avLst/>
@@ -13243,7 +13243,7 @@
               <a:buNone/>
             </a:pPr>
             <a:r>
-              <a:rPr lang="en-US" sz="4000" b="1" dirty="0">
+              <a:rPr lang="en-US" sz="3200" b="1" dirty="0">
                 <a:solidFill>
                   <a:srgbClr val="111111"/>
                 </a:solidFill>
@@ -13253,7 +13253,7 @@
               </a:rPr>
               <a:t>Topic: Management of Primary Resources</a:t>
             </a:r>
-            <a:endParaRPr lang="en-US" sz="4000" dirty="0"/>
+            <a:endParaRPr lang="en-US" sz="3200" dirty="0"/>
           </a:p>
           <a:p>
             <a:pPr algn="l" indent="0" marL="0">
@@ -13263,7 +13263,7 @@
               <a:buNone/>
             </a:pPr>
             <a:r>
-              <a:rPr lang="en-US" sz="4000" b="1" dirty="0">
+              <a:rPr lang="en-US" sz="3200" b="1" dirty="0">
                 <a:solidFill>
                   <a:srgbClr val="111111"/>
                 </a:solidFill>
@@ -13273,7 +13273,7 @@
               </a:rPr>
               <a:t>Sub-topic: The Economic Development Potentials of Cameroon in the Primary Sector: Mining</a:t>
             </a:r>
-            <a:endParaRPr lang="en-US" sz="4000" dirty="0"/>
+            <a:endParaRPr lang="en-US" sz="3200" dirty="0"/>
           </a:p>
           <a:p>
             <a:pPr algn="l" indent="0" marL="0">
@@ -13283,7 +13283,7 @@
               <a:buNone/>
             </a:pPr>
             <a:r>
-              <a:rPr lang="en-US" sz="4000" b="1" dirty="0">
+              <a:rPr lang="en-US" sz="3200" b="1" dirty="0">
                 <a:solidFill>
                   <a:srgbClr val="990011"/>
                 </a:solidFill>
@@ -13293,7 +13293,7 @@
               </a:rPr>
               <a:t>Lesson 44: The Management of Mineral Resources in Cameroon</a:t>
             </a:r>
-            <a:endParaRPr lang="en-US" sz="4000" dirty="0"/>
+            <a:endParaRPr lang="en-US" sz="3200" dirty="0"/>
           </a:p>
         </p:txBody>
       </p:sp>

--- a/lecons/F4/56_F4_M2_L44_The_Management_of_Mineral_Resources_in_Cameroon.pptx
+++ b/lecons/F4/56_F4_M2_L44_The_Management_of_Mineral_Resources_in_Cameroon.pptx
@@ -56,9 +56,10 @@
     <p:sldId id="304" r:id="rId50"/>
     <p:sldId id="305" r:id="rId51"/>
     <p:sldId id="306" r:id="rId52"/>
+    <p:sldId id="307" r:id="rId53"/>
   </p:sldIdLst>
   <p:notesMasterIdLst>
-    <p:notesMasterId r:id="rId53"/>
+    <p:notesMasterId r:id="rId54"/>
   </p:notesMasterIdLst>
   <p:sldSz cx="12192000" cy="6858000"/>
   <p:notesSz cx="6858000" cy="12192000"/>
@@ -3280,7 +3281,7 @@
           <a:p>
             <a:r>
               <a:rPr lang="en-US" dirty="0"/>
-              <a:t>Let us copy Development and Importance. Minerals are developed and are important as follows. On this slide we have Efforts to develop and Importance. Write each point on a new line, with the key term first, and explain it in your own words when we revise.</a:t>
+              <a:t>Let us copy Efforts to Develop Minerals. The state develops minerals by the following efforts. On this slide we have Agreements with investors and Ports and railways. Write each point on a new line, with the key term first, and explain it in your own words when we revise.</a:t>
             </a:r>
             <a:endParaRPr lang="en-US" dirty="0"/>
           </a:p>
@@ -3368,7 +3369,7 @@
           <a:p>
             <a:r>
               <a:rPr lang="en-US" dirty="0"/>
-              <a:t>Let us copy Government Efforts to Conserve. The government conserves minerals as follows. On this slide we have Laws and Control and rehabilitation. Write each point on a new line, with the key term first, and explain it in your own words when we revise.</a:t>
+              <a:t>Let us copy Importance. Minerals are important for Cameroon for the following reasons. On this slide we have Export income, Jobs and Raw materials. Write each point on a new line, with the key term first, and explain it in your own words when we revise.</a:t>
             </a:r>
             <a:endParaRPr lang="en-US" dirty="0"/>
           </a:p>
@@ -3544,7 +3545,7 @@
           <a:p>
             <a:r>
               <a:rPr lang="en-US" dirty="0"/>
-              <a:t>Now let us check what you have understood. Question 1: Name three minerals of Cameroon and their location. Answer in your exercise book.</a:t>
+              <a:t>Let us copy Government Efforts to Conserve. The government conserves minerals as follows. On this slide we have Laws and Control and rehabilitation. Write each point on a new line, with the key term first, and explain it in your own words when we revise.</a:t>
             </a:r>
             <a:endParaRPr lang="en-US" dirty="0"/>
           </a:p>
@@ -3632,7 +3633,7 @@
           <a:p>
             <a:r>
               <a:rPr lang="en-US" dirty="0"/>
-              <a:t>The expected answer is: oil (coast), bauxite (Minim-Martap), gold (East). If you got it right, well done.</a:t>
+              <a:t>Now let us check what you have understood. Question 1: Name three minerals of Cameroon and their location. Answer in your exercise book.</a:t>
             </a:r>
             <a:endParaRPr lang="en-US" dirty="0"/>
           </a:p>
@@ -3720,7 +3721,7 @@
           <a:p>
             <a:r>
               <a:rPr lang="en-US" dirty="0"/>
-              <a:t>Now let us check what you have understood. Question 2: Give two government efforts. Answer in your exercise book.</a:t>
+              <a:t>The expected answer is: oil (coast), bauxite (Minim-Martap), gold (East). If you got it right, well done.</a:t>
             </a:r>
             <a:endParaRPr lang="en-US" dirty="0"/>
           </a:p>
@@ -3808,7 +3809,7 @@
           <a:p>
             <a:r>
               <a:rPr lang="en-US" dirty="0"/>
-              <a:t>The expected answer is: mining Code and fight against illegal mining. If you got it right, well done.</a:t>
+              <a:t>Now let us check what you have understood. Question 2: Give two government efforts. Answer in your exercise book.</a:t>
             </a:r>
             <a:endParaRPr lang="en-US" dirty="0"/>
           </a:p>
@@ -3896,7 +3897,7 @@
           <a:p>
             <a:r>
               <a:rPr lang="en-US" dirty="0"/>
-              <a:t>For those who need more practice, fill in the blanks in your exercise book. The answers are: number 1, Minim-Martap; number 2, Figuil; number 3, artisanal.</a:t>
+              <a:t>The expected answer is: mining Code and fight against illegal mining. If you got it right, well done.</a:t>
             </a:r>
             <a:endParaRPr lang="en-US" dirty="0"/>
           </a:p>
@@ -3984,7 +3985,7 @@
           <a:p>
             <a:r>
               <a:rPr lang="en-US" dirty="0"/>
-              <a:t>For your homework: Give two advantages and two dangers of artisanal gold mining. We shall correct it at the beginning of our next lesson.</a:t>
+              <a:t>For those who need more practice, fill in the blanks in your exercise book. The answers are: number 1, Minim-Martap; number 2, Figuil; number 3, artisanal.</a:t>
             </a:r>
             <a:endParaRPr lang="en-US" dirty="0"/>
           </a:p>
@@ -4072,7 +4073,7 @@
           <a:p>
             <a:r>
               <a:rPr lang="en-US" dirty="0"/>
-              <a:t>Our next lesson will be on Lesson 45: Energy Resources. Thank you for your attention, and see you next time.</a:t>
+              <a:t>For your homework: Give two advantages and two dangers of artisanal gold mining. We shall correct it at the beginning of our next lesson.</a:t>
             </a:r>
             <a:endParaRPr lang="en-US" dirty="0"/>
           </a:p>
@@ -4160,7 +4161,7 @@
           <a:p>
             <a:r>
               <a:rPr lang="en-US" dirty="0"/>
-              <a:t>Let us play the bilingual game. I say a word in English, and you give me the French word. Then we do the reverse.</a:t>
+              <a:t>Our next lesson will be on Lesson 45: Energy Resources. Thank you for your attention, and see you next time.</a:t>
             </a:r>
             <a:endParaRPr lang="en-US" dirty="0"/>
           </a:p>
@@ -4248,7 +4249,7 @@
           <a:p>
             <a:r>
               <a:rPr lang="en-US" dirty="0"/>
-              <a:t>I record this information in the official logbook of the class after the lesson.</a:t>
+              <a:t>Let us play the bilingual game. I say a word in English, and you give me the French word. Then we do the reverse.</a:t>
             </a:r>
             <a:endParaRPr lang="en-US" dirty="0"/>
           </a:p>
@@ -4336,7 +4337,7 @@
           <a:p>
             <a:r>
               <a:rPr lang="en-US" dirty="0"/>
-              <a:t>I complete the second page of the logbook: the matter taught, the evaluation, the homework and the attendance.</a:t>
+              <a:t>I record this information in the official logbook of the class after the lesson.</a:t>
             </a:r>
             <a:endParaRPr lang="en-US" dirty="0"/>
           </a:p>
@@ -4512,7 +4513,7 @@
           <a:p>
             <a:r>
               <a:rPr lang="en-US" dirty="0"/>
-              <a:t>This slide is for me, the teacher: it gives the timing of the lesson and what to do if the projector is not available.</a:t>
+              <a:t>I complete the second page of the logbook: the matter taught, the evaluation, the homework and the attendance.</a:t>
             </a:r>
             <a:endParaRPr lang="en-US" dirty="0"/>
           </a:p>
@@ -4600,7 +4601,7 @@
           <a:p>
             <a:r>
               <a:rPr lang="en-US" dirty="0"/>
-              <a:t>These are the references and picture credits used to prepare this lesson.</a:t>
+              <a:t>This slide is for me, the teacher: it gives the timing of the lesson and what to do if the projector is not available.</a:t>
             </a:r>
             <a:endParaRPr lang="en-US" dirty="0"/>
           </a:p>
@@ -4624,6 +4625,94 @@
             <a:fld id="{F7021451-1387-4CA6-816F-3879F97B5CBC}" type="slidenum">
               <a:rPr lang="en-US"/>
               <a:t>51</a:t>
+            </a:fld>
+            <a:endParaRPr lang="en-US"/>
+          </a:p>
+        </p:txBody>
+      </p:sp>
+    </p:spTree>
+    <p:extLst>
+      <p:ext uri="{BB962C8B-B14F-4D97-AF65-F5344CB8AC3E}">
+        <p14:creationId xmlns:p14="http://schemas.microsoft.com/office/powerpoint/2010/main" val="1024086991"/>
+      </p:ext>
+    </p:extLst>
+  </p:cSld>
+  <p:clrMapOvr>
+    <a:masterClrMapping/>
+  </p:clrMapOvr>
+</p:notes>
+</file>
+
+<file path=ppt/notesSlides/notesSlide52.xml><?xml version="1.0" encoding="utf-8"?>
+<p:notes xmlns:a="http://schemas.openxmlformats.org/drawingml/2006/main" xmlns:r="http://schemas.openxmlformats.org/officeDocument/2006/relationships" xmlns:p="http://schemas.openxmlformats.org/presentationml/2006/main">
+  <p:cSld>
+    <p:spTree>
+      <p:nvGrpSpPr>
+        <p:cNvPr id="1" name=""/>
+        <p:cNvGrpSpPr/>
+        <p:nvPr/>
+      </p:nvGrpSpPr>
+      <p:grpSpPr>
+        <a:xfrm>
+          <a:off x="0" y="0"/>
+          <a:ext cx="0" cy="0"/>
+          <a:chOff x="0" y="0"/>
+          <a:chExt cx="0" cy="0"/>
+        </a:xfrm>
+      </p:grpSpPr>
+      <p:sp>
+        <p:nvSpPr>
+          <p:cNvPr id="2" name="Slide Image Placeholder 1"/>
+          <p:cNvSpPr>
+            <a:spLocks noGrp="1" noRot="1" noChangeAspect="1"/>
+          </p:cNvSpPr>
+          <p:nvPr>
+            <p:ph type="sldImg"/>
+          </p:nvPr>
+        </p:nvSpPr>
+        <p:spPr/>
+      </p:sp>
+      <p:sp>
+        <p:nvSpPr>
+          <p:cNvPr id="3" name="Notes Placeholder 2"/>
+          <p:cNvSpPr>
+            <a:spLocks noGrp="1"/>
+          </p:cNvSpPr>
+          <p:nvPr>
+            <p:ph type="body" idx="1"/>
+          </p:nvPr>
+        </p:nvSpPr>
+        <p:spPr/>
+        <p:txBody>
+          <a:bodyPr/>
+          <a:lstStyle/>
+          <a:p>
+            <a:r>
+              <a:rPr lang="en-US" dirty="0"/>
+              <a:t>These are the references and picture credits used to prepare this lesson.</a:t>
+            </a:r>
+            <a:endParaRPr lang="en-US" dirty="0"/>
+          </a:p>
+        </p:txBody>
+      </p:sp>
+      <p:sp>
+        <p:nvSpPr>
+          <p:cNvPr id="4" name="Slide Number Placeholder 3"/>
+          <p:cNvSpPr>
+            <a:spLocks noGrp="1"/>
+          </p:cNvSpPr>
+          <p:nvPr>
+            <p:ph type="sldNum" sz="quarter" idx="10"/>
+          </p:nvPr>
+        </p:nvSpPr>
+        <p:spPr/>
+        <p:txBody>
+          <a:bodyPr/>
+          <a:lstStyle/>
+          <a:p>
+            <a:fld id="{F7021451-1387-4CA6-816F-3879F97B5CBC}" type="slidenum">
+              <a:rPr lang="en-US"/>
+              <a:t>52</a:t>
             </a:fld>
             <a:endParaRPr lang="en-US"/>
           </a:p>
@@ -14169,7 +14258,7 @@
         <p:spPr>
           <a:xfrm>
             <a:off x="0" y="658368"/>
-            <a:ext cx="1463040" cy="5833872"/>
+            <a:ext cx="2468880" cy="5833872"/>
           </a:xfrm>
           <a:prstGeom prst="rect">
             <a:avLst/>
@@ -14184,8 +14273,8 @@
         </p:nvSpPr>
         <p:spPr>
           <a:xfrm>
-            <a:off x="1691640" y="1005840"/>
-            <a:ext cx="10180015" cy="731520"/>
+            <a:off x="2697480" y="1005840"/>
+            <a:ext cx="9174175" cy="731520"/>
           </a:xfrm>
           <a:prstGeom prst="rect">
             <a:avLst/>
@@ -14225,8 +14314,47 @@
         </p:nvSpPr>
         <p:spPr>
           <a:xfrm>
-            <a:off x="1691640" y="1783080"/>
-            <a:ext cx="10180015" cy="4663440"/>
+            <a:off x="2697480" y="1737360"/>
+            <a:ext cx="9174175" cy="457200"/>
+          </a:xfrm>
+          <a:prstGeom prst="rect">
+            <a:avLst/>
+          </a:prstGeom>
+          <a:noFill/>
+          <a:ln/>
+        </p:spPr>
+        <p:txBody>
+          <a:bodyPr wrap="square" lIns="0" tIns="0" rIns="0" bIns="0" rtlCol="0" anchor="ctr"/>
+          <a:lstStyle/>
+          <a:p>
+            <a:pPr algn="l" indent="0" marL="0">
+              <a:buNone/>
+            </a:pPr>
+            <a:r>
+              <a:rPr lang="en-US" sz="3200" b="1" dirty="0">
+                <a:solidFill>
+                  <a:srgbClr val="990011"/>
+                </a:solidFill>
+                <a:latin typeface="Times New Roman" pitchFamily="34" charset="0"/>
+                <a:ea typeface="Times New Roman" pitchFamily="34" charset="-122"/>
+                <a:cs typeface="Times New Roman" pitchFamily="34" charset="-120"/>
+              </a:rPr>
+              <a:t>A) Efforts to Develop Minerals</a:t>
+            </a:r>
+            <a:endParaRPr lang="en-US" sz="3200" dirty="0"/>
+          </a:p>
+        </p:txBody>
+      </p:sp>
+      <p:sp>
+        <p:nvSpPr>
+          <p:cNvPr id="6" name="Text 3"/>
+          <p:cNvSpPr/>
+          <p:nvPr/>
+        </p:nvSpPr>
+        <p:spPr>
+          <a:xfrm>
+            <a:off x="2697480" y="2240280"/>
+            <a:ext cx="9174175" cy="4206240"/>
           </a:xfrm>
           <a:prstGeom prst="rect">
             <a:avLst/>
@@ -14253,7 +14381,7 @@
                 <a:ea typeface="Times New Roman" pitchFamily="34" charset="-122"/>
                 <a:cs typeface="Times New Roman" pitchFamily="34" charset="-120"/>
               </a:rPr>
-              <a:t>Minerals are developed and are important as follows:</a:t>
+              <a:t>The state develops minerals by the following efforts:</a:t>
             </a:r>
             <a:endParaRPr lang="en-US" sz="4000" dirty="0"/>
           </a:p>
@@ -14273,7 +14401,7 @@
                 <a:ea typeface="Times New Roman" pitchFamily="34" charset="-122"/>
                 <a:cs typeface="Times New Roman" pitchFamily="34" charset="-120"/>
               </a:rPr>
-              <a:t>Efforts to develop: </a:t>
+              <a:t>Agreements with investors: </a:t>
             </a:r>
             <a:pPr algn="l" indent="0" marL="0">
               <a:spcAft>
@@ -14290,7 +14418,7 @@
                 <a:ea typeface="Times New Roman" pitchFamily="34" charset="-122"/>
                 <a:cs typeface="Times New Roman" pitchFamily="34" charset="-120"/>
               </a:rPr>
-              <a:t>The state signs agreements with investors and builds ports and railways.</a:t>
+              <a:t>The state signs contracts with mining companies.</a:t>
             </a:r>
             <a:endParaRPr lang="en-US" sz="4000" dirty="0"/>
           </a:p>
@@ -14310,7 +14438,7 @@
                 <a:ea typeface="Times New Roman" pitchFamily="34" charset="-122"/>
                 <a:cs typeface="Times New Roman" pitchFamily="34" charset="-120"/>
               </a:rPr>
-              <a:t>Importance: </a:t>
+              <a:t>Ports and railways: </a:t>
             </a:r>
             <a:pPr algn="l" indent="0" marL="0">
               <a:spcAft>
@@ -14327,7 +14455,7 @@
                 <a:ea typeface="Times New Roman" pitchFamily="34" charset="-122"/>
                 <a:cs typeface="Times New Roman" pitchFamily="34" charset="-120"/>
               </a:rPr>
-              <a:t>Minerals bring export income, jobs and raw materials for industry.</a:t>
+              <a:t>They are built to carry the minerals.</a:t>
             </a:r>
             <a:endParaRPr lang="en-US" sz="4000" dirty="0"/>
           </a:p>
@@ -14462,7 +14590,7 @@
         <p:spPr>
           <a:xfrm>
             <a:off x="0" y="658368"/>
-            <a:ext cx="3840480" cy="5833872"/>
+            <a:ext cx="1463040" cy="5833872"/>
           </a:xfrm>
           <a:prstGeom prst="rect">
             <a:avLst/>
@@ -14477,8 +14605,8 @@
         </p:nvSpPr>
         <p:spPr>
           <a:xfrm>
-            <a:off x="4069080" y="1005840"/>
-            <a:ext cx="7802575" cy="731520"/>
+            <a:off x="1691640" y="1005840"/>
+            <a:ext cx="10180015" cy="731520"/>
           </a:xfrm>
           <a:prstGeom prst="rect">
             <a:avLst/>
@@ -14504,7 +14632,7 @@
                 <a:ea typeface="Times New Roman" pitchFamily="34" charset="-122"/>
                 <a:cs typeface="Times New Roman" pitchFamily="34" charset="-120"/>
               </a:rPr>
-              <a:t>3. Government Efforts to Conserve</a:t>
+              <a:t>2. Development and Importance</a:t>
             </a:r>
             <a:endParaRPr lang="en-US" sz="3600" dirty="0"/>
           </a:p>
@@ -14518,8 +14646,47 @@
         </p:nvSpPr>
         <p:spPr>
           <a:xfrm>
-            <a:off x="4069080" y="1783080"/>
-            <a:ext cx="7802575" cy="4663440"/>
+            <a:off x="1691640" y="1737360"/>
+            <a:ext cx="10180015" cy="457200"/>
+          </a:xfrm>
+          <a:prstGeom prst="rect">
+            <a:avLst/>
+          </a:prstGeom>
+          <a:noFill/>
+          <a:ln/>
+        </p:spPr>
+        <p:txBody>
+          <a:bodyPr wrap="square" lIns="0" tIns="0" rIns="0" bIns="0" rtlCol="0" anchor="ctr"/>
+          <a:lstStyle/>
+          <a:p>
+            <a:pPr algn="l" indent="0" marL="0">
+              <a:buNone/>
+            </a:pPr>
+            <a:r>
+              <a:rPr lang="en-US" sz="3200" b="1" dirty="0">
+                <a:solidFill>
+                  <a:srgbClr val="990011"/>
+                </a:solidFill>
+                <a:latin typeface="Times New Roman" pitchFamily="34" charset="0"/>
+                <a:ea typeface="Times New Roman" pitchFamily="34" charset="-122"/>
+                <a:cs typeface="Times New Roman" pitchFamily="34" charset="-120"/>
+              </a:rPr>
+              <a:t>B) Importance</a:t>
+            </a:r>
+            <a:endParaRPr lang="en-US" sz="3200" dirty="0"/>
+          </a:p>
+        </p:txBody>
+      </p:sp>
+      <p:sp>
+        <p:nvSpPr>
+          <p:cNvPr id="6" name="Text 3"/>
+          <p:cNvSpPr/>
+          <p:nvPr/>
+        </p:nvSpPr>
+        <p:spPr>
+          <a:xfrm>
+            <a:off x="1691640" y="2240280"/>
+            <a:ext cx="10180015" cy="4206240"/>
           </a:xfrm>
           <a:prstGeom prst="rect">
             <a:avLst/>
@@ -14546,7 +14713,7 @@
                 <a:ea typeface="Times New Roman" pitchFamily="34" charset="-122"/>
                 <a:cs typeface="Times New Roman" pitchFamily="34" charset="-120"/>
               </a:rPr>
-              <a:t>The government conserves minerals as follows:</a:t>
+              <a:t>Minerals are important for Cameroon for the following reasons:</a:t>
             </a:r>
             <a:endParaRPr lang="en-US" sz="4000" dirty="0"/>
           </a:p>
@@ -14566,7 +14733,7 @@
                 <a:ea typeface="Times New Roman" pitchFamily="34" charset="-122"/>
                 <a:cs typeface="Times New Roman" pitchFamily="34" charset="-120"/>
               </a:rPr>
-              <a:t>Laws: </a:t>
+              <a:t>Export income: </a:t>
             </a:r>
             <a:pPr algn="l" indent="0" marL="0">
               <a:spcAft>
@@ -14583,7 +14750,7 @@
                 <a:ea typeface="Times New Roman" pitchFamily="34" charset="-122"/>
                 <a:cs typeface="Times New Roman" pitchFamily="34" charset="-120"/>
               </a:rPr>
-              <a:t>The Mining Code controls exploitation and requires permits.</a:t>
+              <a:t>Oil and gold are sold abroad.</a:t>
             </a:r>
             <a:endParaRPr lang="en-US" sz="4000" dirty="0"/>
           </a:p>
@@ -14603,7 +14770,7 @@
                 <a:ea typeface="Times New Roman" pitchFamily="34" charset="-122"/>
                 <a:cs typeface="Times New Roman" pitchFamily="34" charset="-120"/>
               </a:rPr>
-              <a:t>Control and rehabilitation: </a:t>
+              <a:t>Jobs: </a:t>
             </a:r>
             <a:pPr algn="l" indent="0" marL="0">
               <a:spcAft>
@@ -14620,7 +14787,44 @@
                 <a:ea typeface="Times New Roman" pitchFamily="34" charset="-122"/>
                 <a:cs typeface="Times New Roman" pitchFamily="34" charset="-120"/>
               </a:rPr>
-              <a:t>Illegal mining is fought and damaged land must be restored.</a:t>
+              <a:t>Mines employ many people.</a:t>
+            </a:r>
+            <a:endParaRPr lang="en-US" sz="4000" dirty="0"/>
+          </a:p>
+          <a:p>
+            <a:pPr algn="l" indent="0" marL="0">
+              <a:spcAft>
+                <a:spcPts val="800"/>
+              </a:spcAft>
+              <a:buNone/>
+            </a:pPr>
+            <a:r>
+              <a:rPr lang="en-US" sz="4000" b="1" dirty="0">
+                <a:solidFill>
+                  <a:srgbClr val="111111"/>
+                </a:solidFill>
+                <a:latin typeface="Times New Roman" pitchFamily="34" charset="0"/>
+                <a:ea typeface="Times New Roman" pitchFamily="34" charset="-122"/>
+                <a:cs typeface="Times New Roman" pitchFamily="34" charset="-120"/>
+              </a:rPr>
+              <a:t>Raw materials: </a:t>
+            </a:r>
+            <a:pPr algn="l" indent="0" marL="0">
+              <a:spcAft>
+                <a:spcPts val="800"/>
+              </a:spcAft>
+              <a:buNone/>
+            </a:pPr>
+            <a:r>
+              <a:rPr lang="en-US" sz="4000" dirty="0">
+                <a:solidFill>
+                  <a:srgbClr val="111111"/>
+                </a:solidFill>
+                <a:latin typeface="Times New Roman" pitchFamily="34" charset="0"/>
+                <a:ea typeface="Times New Roman" pitchFamily="34" charset="-122"/>
+                <a:cs typeface="Times New Roman" pitchFamily="34" charset="-120"/>
+              </a:rPr>
+              <a:t>Limestone gives cement for building.</a:t>
             </a:r>
             <a:endParaRPr lang="en-US" sz="4000" dirty="0"/>
           </a:p>
@@ -14971,7 +15175,7 @@
                 <a:ea typeface="Calibri" pitchFamily="34" charset="-122"/>
                 <a:cs typeface="Calibri" pitchFamily="34" charset="-120"/>
               </a:rPr>
-              <a:t>FORMATIVE EVALUATION</a:t>
+              <a:t>BOARD SUMMARY</a:t>
             </a:r>
             <a:endParaRPr lang="en-US" sz="1400" dirty="0"/>
           </a:p>
@@ -14994,7 +15198,7 @@
         <p:spPr>
           <a:xfrm>
             <a:off x="0" y="658368"/>
-            <a:ext cx="5120640" cy="5833872"/>
+            <a:ext cx="3840480" cy="5833872"/>
           </a:xfrm>
           <a:prstGeom prst="rect">
             <a:avLst/>
@@ -15009,8 +15213,8 @@
         </p:nvSpPr>
         <p:spPr>
           <a:xfrm>
-            <a:off x="5349240" y="1005840"/>
-            <a:ext cx="6522415" cy="731520"/>
+            <a:off x="4069080" y="1005840"/>
+            <a:ext cx="7802575" cy="731520"/>
           </a:xfrm>
           <a:prstGeom prst="rect">
             <a:avLst/>
@@ -15036,7 +15240,7 @@
                 <a:ea typeface="Times New Roman" pitchFamily="34" charset="-122"/>
                 <a:cs typeface="Times New Roman" pitchFamily="34" charset="-120"/>
               </a:rPr>
-              <a:t>Evaluation 1</a:t>
+              <a:t>3. Government Efforts to Conserve</a:t>
             </a:r>
             <a:endParaRPr lang="en-US" sz="3600" dirty="0"/>
           </a:p>
@@ -15050,8 +15254,8 @@
         </p:nvSpPr>
         <p:spPr>
           <a:xfrm>
-            <a:off x="5349240" y="1783080"/>
-            <a:ext cx="6522415" cy="4663440"/>
+            <a:off x="4069080" y="1783080"/>
+            <a:ext cx="7802575" cy="4663440"/>
           </a:xfrm>
           <a:prstGeom prst="rect">
             <a:avLst/>
@@ -15070,7 +15274,7 @@
               <a:buNone/>
             </a:pPr>
             <a:r>
-              <a:rPr lang="en-US" sz="4000" dirty="0">
+              <a:rPr lang="en-US" sz="4000" i="1" dirty="0">
                 <a:solidFill>
                   <a:srgbClr val="111111"/>
                 </a:solidFill>
@@ -15078,7 +15282,81 @@
                 <a:ea typeface="Times New Roman" pitchFamily="34" charset="-122"/>
                 <a:cs typeface="Times New Roman" pitchFamily="34" charset="-120"/>
               </a:rPr>
-              <a:t>Name three minerals of Cameroon and their location.</a:t>
+              <a:t>The government conserves minerals as follows:</a:t>
+            </a:r>
+            <a:endParaRPr lang="en-US" sz="4000" dirty="0"/>
+          </a:p>
+          <a:p>
+            <a:pPr algn="l" indent="0" marL="0">
+              <a:spcAft>
+                <a:spcPts val="800"/>
+              </a:spcAft>
+              <a:buNone/>
+            </a:pPr>
+            <a:r>
+              <a:rPr lang="en-US" sz="4000" b="1" dirty="0">
+                <a:solidFill>
+                  <a:srgbClr val="111111"/>
+                </a:solidFill>
+                <a:latin typeface="Times New Roman" pitchFamily="34" charset="0"/>
+                <a:ea typeface="Times New Roman" pitchFamily="34" charset="-122"/>
+                <a:cs typeface="Times New Roman" pitchFamily="34" charset="-120"/>
+              </a:rPr>
+              <a:t>Laws: </a:t>
+            </a:r>
+            <a:pPr algn="l" indent="0" marL="0">
+              <a:spcAft>
+                <a:spcPts val="800"/>
+              </a:spcAft>
+              <a:buNone/>
+            </a:pPr>
+            <a:r>
+              <a:rPr lang="en-US" sz="4000" dirty="0">
+                <a:solidFill>
+                  <a:srgbClr val="111111"/>
+                </a:solidFill>
+                <a:latin typeface="Times New Roman" pitchFamily="34" charset="0"/>
+                <a:ea typeface="Times New Roman" pitchFamily="34" charset="-122"/>
+                <a:cs typeface="Times New Roman" pitchFamily="34" charset="-120"/>
+              </a:rPr>
+              <a:t>The Mining Code controls exploitation and requires permits.</a:t>
+            </a:r>
+            <a:endParaRPr lang="en-US" sz="4000" dirty="0"/>
+          </a:p>
+          <a:p>
+            <a:pPr algn="l" indent="0" marL="0">
+              <a:spcAft>
+                <a:spcPts val="800"/>
+              </a:spcAft>
+              <a:buNone/>
+            </a:pPr>
+            <a:r>
+              <a:rPr lang="en-US" sz="4000" b="1" dirty="0">
+                <a:solidFill>
+                  <a:srgbClr val="111111"/>
+                </a:solidFill>
+                <a:latin typeface="Times New Roman" pitchFamily="34" charset="0"/>
+                <a:ea typeface="Times New Roman" pitchFamily="34" charset="-122"/>
+                <a:cs typeface="Times New Roman" pitchFamily="34" charset="-120"/>
+              </a:rPr>
+              <a:t>Control and rehabilitation: </a:t>
+            </a:r>
+            <a:pPr algn="l" indent="0" marL="0">
+              <a:spcAft>
+                <a:spcPts val="800"/>
+              </a:spcAft>
+              <a:buNone/>
+            </a:pPr>
+            <a:r>
+              <a:rPr lang="en-US" sz="4000" dirty="0">
+                <a:solidFill>
+                  <a:srgbClr val="111111"/>
+                </a:solidFill>
+                <a:latin typeface="Times New Roman" pitchFamily="34" charset="0"/>
+                <a:ea typeface="Times New Roman" pitchFamily="34" charset="-122"/>
+                <a:cs typeface="Times New Roman" pitchFamily="34" charset="-120"/>
+              </a:rPr>
+              <a:t>Illegal mining is fought and damaged land must be restored.</a:t>
             </a:r>
             <a:endParaRPr lang="en-US" sz="4000" dirty="0"/>
           </a:p>
@@ -15255,7 +15533,7 @@
                 <a:ea typeface="Times New Roman" pitchFamily="34" charset="-122"/>
                 <a:cs typeface="Times New Roman" pitchFamily="34" charset="-120"/>
               </a:rPr>
-              <a:t>Expected Answer</a:t>
+              <a:t>Evaluation 1</a:t>
             </a:r>
             <a:endParaRPr lang="en-US" sz="3600" dirty="0"/>
           </a:p>
@@ -15297,7 +15575,7 @@
                 <a:ea typeface="Times New Roman" pitchFamily="34" charset="-122"/>
                 <a:cs typeface="Times New Roman" pitchFamily="34" charset="-120"/>
               </a:rPr>
-              <a:t>Oil (coast), bauxite (Minim-Martap), gold (East).</a:t>
+              <a:t>Name three minerals of Cameroon and their location.</a:t>
             </a:r>
             <a:endParaRPr lang="en-US" sz="4000" dirty="0"/>
           </a:p>
@@ -15474,7 +15752,7 @@
                 <a:ea typeface="Times New Roman" pitchFamily="34" charset="-122"/>
                 <a:cs typeface="Times New Roman" pitchFamily="34" charset="-120"/>
               </a:rPr>
-              <a:t>Evaluation 2</a:t>
+              <a:t>Expected Answer</a:t>
             </a:r>
             <a:endParaRPr lang="en-US" sz="3600" dirty="0"/>
           </a:p>
@@ -15516,7 +15794,7 @@
                 <a:ea typeface="Times New Roman" pitchFamily="34" charset="-122"/>
                 <a:cs typeface="Times New Roman" pitchFamily="34" charset="-120"/>
               </a:rPr>
-              <a:t>Give two government efforts.</a:t>
+              <a:t>Oil (coast), bauxite (Minim-Martap), gold (East).</a:t>
             </a:r>
             <a:endParaRPr lang="en-US" sz="4000" dirty="0"/>
           </a:p>
@@ -15693,7 +15971,7 @@
                 <a:ea typeface="Times New Roman" pitchFamily="34" charset="-122"/>
                 <a:cs typeface="Times New Roman" pitchFamily="34" charset="-120"/>
               </a:rPr>
-              <a:t>Expected Answer</a:t>
+              <a:t>Evaluation 2</a:t>
             </a:r>
             <a:endParaRPr lang="en-US" sz="3600" dirty="0"/>
           </a:p>
@@ -15735,7 +16013,7 @@
                 <a:ea typeface="Times New Roman" pitchFamily="34" charset="-122"/>
                 <a:cs typeface="Times New Roman" pitchFamily="34" charset="-120"/>
               </a:rPr>
-              <a:t>Mining Code and fight against illegal mining.</a:t>
+              <a:t>Give two government efforts.</a:t>
             </a:r>
             <a:endParaRPr lang="en-US" sz="4000" dirty="0"/>
           </a:p>
@@ -15847,7 +16125,7 @@
                 <a:ea typeface="Calibri" pitchFamily="34" charset="-122"/>
                 <a:cs typeface="Calibri" pitchFamily="34" charset="-120"/>
               </a:rPr>
-              <a:t>REMEDIATION</a:t>
+              <a:t>FORMATIVE EVALUATION</a:t>
             </a:r>
             <a:endParaRPr lang="en-US" sz="1400" dirty="0"/>
           </a:p>
@@ -15870,7 +16148,7 @@
         <p:spPr>
           <a:xfrm>
             <a:off x="0" y="658368"/>
-            <a:ext cx="1463040" cy="5833872"/>
+            <a:ext cx="5120640" cy="5833872"/>
           </a:xfrm>
           <a:prstGeom prst="rect">
             <a:avLst/>
@@ -15885,8 +16163,8 @@
         </p:nvSpPr>
         <p:spPr>
           <a:xfrm>
-            <a:off x="1691640" y="1005840"/>
-            <a:ext cx="10180015" cy="731520"/>
+            <a:off x="5349240" y="1005840"/>
+            <a:ext cx="6522415" cy="731520"/>
           </a:xfrm>
           <a:prstGeom prst="rect">
             <a:avLst/>
@@ -15912,7 +16190,7 @@
                 <a:ea typeface="Times New Roman" pitchFamily="34" charset="-122"/>
                 <a:cs typeface="Times New Roman" pitchFamily="34" charset="-120"/>
               </a:rPr>
-              <a:t>Remediation</a:t>
+              <a:t>Expected Answer</a:t>
             </a:r>
             <a:endParaRPr lang="en-US" sz="3600" dirty="0"/>
           </a:p>
@@ -15926,8 +16204,8 @@
         </p:nvSpPr>
         <p:spPr>
           <a:xfrm>
-            <a:off x="1691640" y="1783080"/>
-            <a:ext cx="10180015" cy="4663440"/>
+            <a:off x="5349240" y="1783080"/>
+            <a:ext cx="6522415" cy="4663440"/>
           </a:xfrm>
           <a:prstGeom prst="rect">
             <a:avLst/>
@@ -15946,7 +16224,7 @@
               <a:buNone/>
             </a:pPr>
             <a:r>
-              <a:rPr lang="en-US" sz="4000" b="1" dirty="0">
+              <a:rPr lang="en-US" sz="4000" dirty="0">
                 <a:solidFill>
                   <a:srgbClr val="111111"/>
                 </a:solidFill>
@@ -15954,73 +16232,7 @@
                 <a:ea typeface="Times New Roman" pitchFamily="34" charset="-122"/>
                 <a:cs typeface="Times New Roman" pitchFamily="34" charset="-120"/>
               </a:rPr>
-              <a:t>Fill in the blanks:</a:t>
-            </a:r>
-            <a:endParaRPr lang="en-US" sz="4000" dirty="0"/>
-          </a:p>
-          <a:p>
-            <a:pPr algn="l" marL="342900" indent="-342900">
-              <a:spcAft>
-                <a:spcPts val="800"/>
-              </a:spcAft>
-              <a:buSzPct val="100000"/>
-              <a:buFont typeface="+mj-lt"/>
-              <a:buAutoNum type="arabicPeriod" startAt="1"/>
-            </a:pPr>
-            <a:r>
-              <a:rPr lang="en-US" sz="4000" dirty="0">
-                <a:solidFill>
-                  <a:srgbClr val="111111"/>
-                </a:solidFill>
-                <a:latin typeface="Times New Roman" pitchFamily="34" charset="0"/>
-                <a:ea typeface="Times New Roman" pitchFamily="34" charset="-122"/>
-                <a:cs typeface="Times New Roman" pitchFamily="34" charset="-120"/>
-              </a:rPr>
-              <a:t>The bauxite deposit of Adamawa is at ______.</a:t>
-            </a:r>
-            <a:endParaRPr lang="en-US" sz="4000" dirty="0"/>
-          </a:p>
-          <a:p>
-            <a:pPr algn="l" marL="342900" indent="-342900">
-              <a:spcAft>
-                <a:spcPts val="800"/>
-              </a:spcAft>
-              <a:buSzPct val="100000"/>
-              <a:buFont typeface="+mj-lt"/>
-              <a:buAutoNum type="arabicPeriod" startAt="1"/>
-            </a:pPr>
-            <a:r>
-              <a:rPr lang="en-US" sz="4000" dirty="0">
-                <a:solidFill>
-                  <a:srgbClr val="111111"/>
-                </a:solidFill>
-                <a:latin typeface="Times New Roman" pitchFamily="34" charset="0"/>
-                <a:ea typeface="Times New Roman" pitchFamily="34" charset="-122"/>
-                <a:cs typeface="Times New Roman" pitchFamily="34" charset="-120"/>
-              </a:rPr>
-              <a:t>Limestone for cement is found at ______.</a:t>
-            </a:r>
-            <a:endParaRPr lang="en-US" sz="4000" dirty="0"/>
-          </a:p>
-          <a:p>
-            <a:pPr algn="l" marL="342900" indent="-342900">
-              <a:spcAft>
-                <a:spcPts val="800"/>
-              </a:spcAft>
-              <a:buSzPct val="100000"/>
-              <a:buFont typeface="+mj-lt"/>
-              <a:buAutoNum type="arabicPeriod" startAt="1"/>
-            </a:pPr>
-            <a:r>
-              <a:rPr lang="en-US" sz="4000" dirty="0">
-                <a:solidFill>
-                  <a:srgbClr val="111111"/>
-                </a:solidFill>
-                <a:latin typeface="Times New Roman" pitchFamily="34" charset="0"/>
-                <a:ea typeface="Times New Roman" pitchFamily="34" charset="-122"/>
-                <a:cs typeface="Times New Roman" pitchFamily="34" charset="-120"/>
-              </a:rPr>
-              <a:t>Small-scale mining by hand is ______ mining.</a:t>
+              <a:t>Mining Code and fight against illegal mining.</a:t>
             </a:r>
             <a:endParaRPr lang="en-US" sz="4000" dirty="0"/>
           </a:p>
@@ -16132,7 +16344,7 @@
                 <a:ea typeface="Calibri" pitchFamily="34" charset="-122"/>
                 <a:cs typeface="Calibri" pitchFamily="34" charset="-120"/>
               </a:rPr>
-              <a:t>HOMEWORK</a:t>
+              <a:t>REMEDIATION</a:t>
             </a:r>
             <a:endParaRPr lang="en-US" sz="1400" dirty="0"/>
           </a:p>
@@ -16155,7 +16367,7 @@
         <p:spPr>
           <a:xfrm>
             <a:off x="0" y="658368"/>
-            <a:ext cx="5120640" cy="5833872"/>
+            <a:ext cx="1463040" cy="5833872"/>
           </a:xfrm>
           <a:prstGeom prst="rect">
             <a:avLst/>
@@ -16170,8 +16382,8 @@
         </p:nvSpPr>
         <p:spPr>
           <a:xfrm>
-            <a:off x="5349240" y="1005840"/>
-            <a:ext cx="6522415" cy="731520"/>
+            <a:off x="1691640" y="1005840"/>
+            <a:ext cx="10180015" cy="731520"/>
           </a:xfrm>
           <a:prstGeom prst="rect">
             <a:avLst/>
@@ -16197,7 +16409,7 @@
                 <a:ea typeface="Times New Roman" pitchFamily="34" charset="-122"/>
                 <a:cs typeface="Times New Roman" pitchFamily="34" charset="-120"/>
               </a:rPr>
-              <a:t>Homework</a:t>
+              <a:t>Remediation</a:t>
             </a:r>
             <a:endParaRPr lang="en-US" sz="3600" dirty="0"/>
           </a:p>
@@ -16211,8 +16423,8 @@
         </p:nvSpPr>
         <p:spPr>
           <a:xfrm>
-            <a:off x="5349240" y="1783080"/>
-            <a:ext cx="6522415" cy="4663440"/>
+            <a:off x="1691640" y="1783080"/>
+            <a:ext cx="10180015" cy="4663440"/>
           </a:xfrm>
           <a:prstGeom prst="rect">
             <a:avLst/>
@@ -16231,7 +16443,7 @@
               <a:buNone/>
             </a:pPr>
             <a:r>
-              <a:rPr lang="en-US" sz="4000" dirty="0">
+              <a:rPr lang="en-US" sz="4000" b="1" dirty="0">
                 <a:solidFill>
                   <a:srgbClr val="111111"/>
                 </a:solidFill>
@@ -16239,7 +16451,73 @@
                 <a:ea typeface="Times New Roman" pitchFamily="34" charset="-122"/>
                 <a:cs typeface="Times New Roman" pitchFamily="34" charset="-120"/>
               </a:rPr>
-              <a:t>Give two advantages and two dangers of artisanal gold mining.</a:t>
+              <a:t>Fill in the blanks:</a:t>
+            </a:r>
+            <a:endParaRPr lang="en-US" sz="4000" dirty="0"/>
+          </a:p>
+          <a:p>
+            <a:pPr algn="l" marL="342900" indent="-342900">
+              <a:spcAft>
+                <a:spcPts val="800"/>
+              </a:spcAft>
+              <a:buSzPct val="100000"/>
+              <a:buFont typeface="+mj-lt"/>
+              <a:buAutoNum type="arabicPeriod" startAt="1"/>
+            </a:pPr>
+            <a:r>
+              <a:rPr lang="en-US" sz="4000" dirty="0">
+                <a:solidFill>
+                  <a:srgbClr val="111111"/>
+                </a:solidFill>
+                <a:latin typeface="Times New Roman" pitchFamily="34" charset="0"/>
+                <a:ea typeface="Times New Roman" pitchFamily="34" charset="-122"/>
+                <a:cs typeface="Times New Roman" pitchFamily="34" charset="-120"/>
+              </a:rPr>
+              <a:t>The bauxite deposit of Adamawa is at ______.</a:t>
+            </a:r>
+            <a:endParaRPr lang="en-US" sz="4000" dirty="0"/>
+          </a:p>
+          <a:p>
+            <a:pPr algn="l" marL="342900" indent="-342900">
+              <a:spcAft>
+                <a:spcPts val="800"/>
+              </a:spcAft>
+              <a:buSzPct val="100000"/>
+              <a:buFont typeface="+mj-lt"/>
+              <a:buAutoNum type="arabicPeriod" startAt="1"/>
+            </a:pPr>
+            <a:r>
+              <a:rPr lang="en-US" sz="4000" dirty="0">
+                <a:solidFill>
+                  <a:srgbClr val="111111"/>
+                </a:solidFill>
+                <a:latin typeface="Times New Roman" pitchFamily="34" charset="0"/>
+                <a:ea typeface="Times New Roman" pitchFamily="34" charset="-122"/>
+                <a:cs typeface="Times New Roman" pitchFamily="34" charset="-120"/>
+              </a:rPr>
+              <a:t>Limestone for cement is found at ______.</a:t>
+            </a:r>
+            <a:endParaRPr lang="en-US" sz="4000" dirty="0"/>
+          </a:p>
+          <a:p>
+            <a:pPr algn="l" marL="342900" indent="-342900">
+              <a:spcAft>
+                <a:spcPts val="800"/>
+              </a:spcAft>
+              <a:buSzPct val="100000"/>
+              <a:buFont typeface="+mj-lt"/>
+              <a:buAutoNum type="arabicPeriod" startAt="1"/>
+            </a:pPr>
+            <a:r>
+              <a:rPr lang="en-US" sz="4000" dirty="0">
+                <a:solidFill>
+                  <a:srgbClr val="111111"/>
+                </a:solidFill>
+                <a:latin typeface="Times New Roman" pitchFamily="34" charset="0"/>
+                <a:ea typeface="Times New Roman" pitchFamily="34" charset="-122"/>
+                <a:cs typeface="Times New Roman" pitchFamily="34" charset="-120"/>
+              </a:rPr>
+              <a:t>Small-scale mining by hand is ______ mining.</a:t>
             </a:r>
             <a:endParaRPr lang="en-US" sz="4000" dirty="0"/>
           </a:p>
@@ -16351,7 +16629,7 @@
                 <a:ea typeface="Calibri" pitchFamily="34" charset="-122"/>
                 <a:cs typeface="Calibri" pitchFamily="34" charset="-120"/>
               </a:rPr>
-              <a:t>NEXT LESSON</a:t>
+              <a:t>HOMEWORK</a:t>
             </a:r>
             <a:endParaRPr lang="en-US" sz="1400" dirty="0"/>
           </a:p>
@@ -16416,7 +16694,7 @@
                 <a:ea typeface="Times New Roman" pitchFamily="34" charset="-122"/>
                 <a:cs typeface="Times New Roman" pitchFamily="34" charset="-120"/>
               </a:rPr>
-              <a:t>Next Lesson</a:t>
+              <a:t>Homework</a:t>
             </a:r>
             <a:endParaRPr lang="en-US" sz="3600" dirty="0"/>
           </a:p>
@@ -16440,17 +16718,17 @@
           <a:ln/>
         </p:spPr>
         <p:txBody>
-          <a:bodyPr wrap="square" lIns="0" tIns="0" rIns="0" bIns="0" rtlCol="0" anchor="ctr"/>
-          <a:lstStyle/>
-          <a:p>
-            <a:pPr algn="ctr" indent="0" marL="0">
+          <a:bodyPr wrap="square" lIns="0" tIns="0" rIns="0" bIns="0" rtlCol="0" anchor="t"/>
+          <a:lstStyle/>
+          <a:p>
+            <a:pPr algn="l" indent="0" marL="0">
               <a:spcAft>
                 <a:spcPts val="800"/>
               </a:spcAft>
               <a:buNone/>
             </a:pPr>
             <a:r>
-              <a:rPr lang="en-US" sz="4000" b="1" dirty="0">
+              <a:rPr lang="en-US" sz="4000" dirty="0">
                 <a:solidFill>
                   <a:srgbClr val="111111"/>
                 </a:solidFill>
@@ -16458,27 +16736,7 @@
                 <a:ea typeface="Times New Roman" pitchFamily="34" charset="-122"/>
                 <a:cs typeface="Times New Roman" pitchFamily="34" charset="-120"/>
               </a:rPr>
-              <a:t>Our next lesson will be on:</a:t>
-            </a:r>
-            <a:endParaRPr lang="en-US" sz="4000" dirty="0"/>
-          </a:p>
-          <a:p>
-            <a:pPr algn="ctr" indent="0" marL="0">
-              <a:spcAft>
-                <a:spcPts val="800"/>
-              </a:spcAft>
-              <a:buNone/>
-            </a:pPr>
-            <a:r>
-              <a:rPr lang="en-US" sz="4000" b="1" dirty="0">
-                <a:solidFill>
-                  <a:srgbClr val="990011"/>
-                </a:solidFill>
-                <a:latin typeface="Times New Roman" pitchFamily="34" charset="0"/>
-                <a:ea typeface="Times New Roman" pitchFamily="34" charset="-122"/>
-                <a:cs typeface="Times New Roman" pitchFamily="34" charset="-120"/>
-              </a:rPr>
-              <a:t>Lesson 45: Energy Resources</a:t>
+              <a:t>Give two advantages and two dangers of artisanal gold mining.</a:t>
             </a:r>
             <a:endParaRPr lang="en-US" sz="4000" dirty="0"/>
           </a:p>
@@ -16590,6 +16848,245 @@
                 <a:ea typeface="Calibri" pitchFamily="34" charset="-122"/>
                 <a:cs typeface="Calibri" pitchFamily="34" charset="-120"/>
               </a:rPr>
+              <a:t>NEXT LESSON</a:t>
+            </a:r>
+            <a:endParaRPr lang="en-US" sz="1400" dirty="0"/>
+          </a:p>
+        </p:txBody>
+      </p:sp>
+      <p:pic>
+        <p:nvPicPr>
+          <p:cNvPr id="3" name="Image 0" descr="/home/claude/f4/img/minesec_sheet.png">    </p:cNvPr>
+          <p:cNvPicPr>
+            <a:picLocks noChangeAspect="1"/>
+          </p:cNvPicPr>
+          <p:nvPr/>
+        </p:nvPicPr>
+        <p:blipFill>
+          <a:blip r:embed="rId1"/>
+          <a:stretch>
+            <a:fillRect/>
+          </a:stretch>
+        </p:blipFill>
+        <p:spPr>
+          <a:xfrm>
+            <a:off x="0" y="658368"/>
+            <a:ext cx="5120640" cy="5833872"/>
+          </a:xfrm>
+          <a:prstGeom prst="rect">
+            <a:avLst/>
+          </a:prstGeom>
+        </p:spPr>
+      </p:pic>
+      <p:sp>
+        <p:nvSpPr>
+          <p:cNvPr id="4" name="Text 1"/>
+          <p:cNvSpPr/>
+          <p:nvPr/>
+        </p:nvSpPr>
+        <p:spPr>
+          <a:xfrm>
+            <a:off x="5349240" y="1005840"/>
+            <a:ext cx="6522415" cy="731520"/>
+          </a:xfrm>
+          <a:prstGeom prst="rect">
+            <a:avLst/>
+          </a:prstGeom>
+          <a:noFill/>
+          <a:ln/>
+        </p:spPr>
+        <p:txBody>
+          <a:bodyPr wrap="square" lIns="0" tIns="0" rIns="0" bIns="0" rtlCol="0" anchor="ctr">
+            <a:normAutofit/>
+          </a:bodyPr>
+          <a:lstStyle/>
+          <a:p>
+            <a:pPr algn="ctr" indent="0" marL="0">
+              <a:buNone/>
+            </a:pPr>
+            <a:r>
+              <a:rPr lang="en-US" sz="3600" b="1" dirty="0">
+                <a:solidFill>
+                  <a:srgbClr val="990011"/>
+                </a:solidFill>
+                <a:latin typeface="Times New Roman" pitchFamily="34" charset="0"/>
+                <a:ea typeface="Times New Roman" pitchFamily="34" charset="-122"/>
+                <a:cs typeface="Times New Roman" pitchFamily="34" charset="-120"/>
+              </a:rPr>
+              <a:t>Next Lesson</a:t>
+            </a:r>
+            <a:endParaRPr lang="en-US" sz="3600" dirty="0"/>
+          </a:p>
+        </p:txBody>
+      </p:sp>
+      <p:sp>
+        <p:nvSpPr>
+          <p:cNvPr id="5" name="Text 2"/>
+          <p:cNvSpPr/>
+          <p:nvPr/>
+        </p:nvSpPr>
+        <p:spPr>
+          <a:xfrm>
+            <a:off x="5349240" y="1783080"/>
+            <a:ext cx="6522415" cy="4663440"/>
+          </a:xfrm>
+          <a:prstGeom prst="rect">
+            <a:avLst/>
+          </a:prstGeom>
+          <a:noFill/>
+          <a:ln/>
+        </p:spPr>
+        <p:txBody>
+          <a:bodyPr wrap="square" lIns="0" tIns="0" rIns="0" bIns="0" rtlCol="0" anchor="ctr"/>
+          <a:lstStyle/>
+          <a:p>
+            <a:pPr algn="ctr" indent="0" marL="0">
+              <a:spcAft>
+                <a:spcPts val="800"/>
+              </a:spcAft>
+              <a:buNone/>
+            </a:pPr>
+            <a:r>
+              <a:rPr lang="en-US" sz="4000" b="1" dirty="0">
+                <a:solidFill>
+                  <a:srgbClr val="111111"/>
+                </a:solidFill>
+                <a:latin typeface="Times New Roman" pitchFamily="34" charset="0"/>
+                <a:ea typeface="Times New Roman" pitchFamily="34" charset="-122"/>
+                <a:cs typeface="Times New Roman" pitchFamily="34" charset="-120"/>
+              </a:rPr>
+              <a:t>Our next lesson will be on:</a:t>
+            </a:r>
+            <a:endParaRPr lang="en-US" sz="4000" dirty="0"/>
+          </a:p>
+          <a:p>
+            <a:pPr algn="ctr" indent="0" marL="0">
+              <a:spcAft>
+                <a:spcPts val="800"/>
+              </a:spcAft>
+              <a:buNone/>
+            </a:pPr>
+            <a:r>
+              <a:rPr lang="en-US" sz="4000" b="1" dirty="0">
+                <a:solidFill>
+                  <a:srgbClr val="990011"/>
+                </a:solidFill>
+                <a:latin typeface="Times New Roman" pitchFamily="34" charset="0"/>
+                <a:ea typeface="Times New Roman" pitchFamily="34" charset="-122"/>
+                <a:cs typeface="Times New Roman" pitchFamily="34" charset="-120"/>
+              </a:rPr>
+              <a:t>Lesson 45: Energy Resources</a:t>
+            </a:r>
+            <a:endParaRPr lang="en-US" sz="4000" dirty="0"/>
+          </a:p>
+        </p:txBody>
+      </p:sp>
+      <p:sp>
+        <p:nvSpPr>
+          <p:cNvPr id="25" name="Slide Number Placeholder 0"/>
+          <p:cNvSpPr>
+            <a:spLocks noGrp="1"/>
+          </p:cNvSpPr>
+          <p:nvPr>
+            <p:ph type="sldNum" sz="quarter" idx="4294967295"/>
+          </p:nvPr>
+        </p:nvSpPr>
+        <p:spPr>
+          <a:xfrm>
+            <a:off x="27432" y="91440"/>
+            <a:ext cx="585216" cy="475488"/>
+          </a:xfrm>
+          <a:prstGeom prst="rect">
+            <a:avLst/>
+          </a:prstGeom>
+          <a:extLst>
+            <a:ext uri="{C572A759-6A51-4108-AA02-DFA0A04FC94B}">
+              <ma14:wrappingTextBoxFlag xmlns:ma14="http://schemas.microsoft.com/office/mac/drawingml/2011/main" val="0"/>
+            </a:ext>
+          </a:extLst>
+        </p:spPr>
+        <p:txBody>
+          <a:bodyPr/>
+          <a:lstStyle>
+            <a:lvl1pPr>
+              <a:defRPr sz="2000">
+                <a:solidFill>
+                  <a:srgbClr val="FFFFFF"/>
+                </a:solidFill>
+                <a:latin typeface="Calibri"/>
+                <a:ea typeface="Calibri"/>
+                <a:cs typeface="Calibri"/>
+              </a:defRPr>
+            </a:lvl1pPr>
+          </a:lstStyle>
+          <a:p>
+            <a:pPr algn="ctr"/>
+            <a:fld id="{F7021451-1387-4CA6-816F-3879F97B5CBC}" type="slidenum">
+              <a:rPr b="1" lang="en-US"/>
+              <a:t>47</a:t>
+            </a:fld>
+            <a:endParaRPr lang="en-US"/>
+          </a:p>
+        </p:txBody>
+      </p:sp>
+    </p:spTree>
+  </p:cSld>
+  <p:clrMapOvr>
+    <a:masterClrMapping/>
+  </p:clrMapOvr>
+</p:sld>
+</file>
+
+<file path=ppt/slides/slide48.xml><?xml version="1.0" encoding="utf-8"?>
+<p:sld xmlns:a="http://schemas.openxmlformats.org/drawingml/2006/main" xmlns:r="http://schemas.openxmlformats.org/officeDocument/2006/relationships" xmlns:p="http://schemas.openxmlformats.org/presentationml/2006/main">
+  <p:cSld name="Slide 48">
+    <p:spTree>
+      <p:nvGrpSpPr>
+        <p:cNvPr id="1" name=""/>
+        <p:cNvGrpSpPr/>
+        <p:nvPr/>
+      </p:nvGrpSpPr>
+      <p:grpSpPr>
+        <a:xfrm>
+          <a:off x="0" y="0"/>
+          <a:ext cx="0" cy="0"/>
+          <a:chOff x="0" y="0"/>
+          <a:chExt cx="0" cy="0"/>
+        </a:xfrm>
+      </p:grpSpPr>
+      <p:sp>
+        <p:nvSpPr>
+          <p:cNvPr id="2" name="Text 0"/>
+          <p:cNvSpPr/>
+          <p:nvPr/>
+        </p:nvSpPr>
+        <p:spPr>
+          <a:xfrm>
+            <a:off x="457200" y="713232"/>
+            <a:ext cx="11368735" cy="274320"/>
+          </a:xfrm>
+          <a:prstGeom prst="rect">
+            <a:avLst/>
+          </a:prstGeom>
+          <a:noFill/>
+          <a:ln/>
+        </p:spPr>
+        <p:txBody>
+          <a:bodyPr wrap="square" lIns="0" tIns="0" rIns="0" bIns="0" rtlCol="0" anchor="ctr"/>
+          <a:lstStyle/>
+          <a:p>
+            <a:pPr algn="r" indent="0" marL="0">
+              <a:buNone/>
+            </a:pPr>
+            <a:r>
+              <a:rPr lang="en-US" sz="1400" b="1" dirty="0">
+                <a:solidFill>
+                  <a:srgbClr val="1C3F6E"/>
+                </a:solidFill>
+                <a:latin typeface="Calibri" pitchFamily="34" charset="0"/>
+                <a:ea typeface="Calibri" pitchFamily="34" charset="-122"/>
+                <a:cs typeface="Calibri" pitchFamily="34" charset="-120"/>
+              </a:rPr>
               <a:t>BILINGUAL GAME</a:t>
             </a:r>
             <a:endParaRPr lang="en-US" sz="1400" dirty="0"/>
@@ -16637,7 +17134,7 @@
       </p:sp>
       <p:graphicFrame>
         <p:nvGraphicFramePr>
-          <p:cNvPr id="48" name="Table 0"/>
+          <p:cNvPr id="49" name="Table 0"/>
           <p:cNvGraphicFramePr>
             <a:graphicFrameLocks noGrp="1"/>
           </p:cNvGraphicFramePr>
@@ -17673,7 +18170,7 @@
             <a:pPr algn="ctr"/>
             <a:fld id="{F7021451-1387-4CA6-816F-3879F97B5CBC}" type="slidenum">
               <a:rPr b="1" lang="en-US"/>
-              <a:t>47</a:t>
+              <a:t>48</a:t>
             </a:fld>
             <a:endParaRPr lang="en-US"/>
           </a:p>
@@ -17687,9 +18184,9 @@
 </p:sld>
 </file>
 
-<file path=ppt/slides/slide48.xml><?xml version="1.0" encoding="utf-8"?>
+<file path=ppt/slides/slide49.xml><?xml version="1.0" encoding="utf-8"?>
 <p:sld xmlns:a="http://schemas.openxmlformats.org/drawingml/2006/main" xmlns:r="http://schemas.openxmlformats.org/officeDocument/2006/relationships" xmlns:p="http://schemas.openxmlformats.org/presentationml/2006/main">
-  <p:cSld name="Slide 48">
+  <p:cSld name="Slide 49">
     <p:spTree>
       <p:nvGrpSpPr>
         <p:cNvPr id="1" name=""/>
@@ -17784,7 +18281,7 @@
       </p:sp>
       <p:graphicFrame>
         <p:nvGraphicFramePr>
-          <p:cNvPr id="49" name="Table 0"/>
+          <p:cNvPr id="50" name="Table 0"/>
           <p:cNvGraphicFramePr>
             <a:graphicFrameLocks noGrp="1"/>
           </p:cNvGraphicFramePr>
@@ -18406,7 +18903,7 @@
             <a:pPr algn="ctr"/>
             <a:fld id="{F7021451-1387-4CA6-816F-3879F97B5CBC}" type="slidenum">
               <a:rPr b="1" lang="en-US"/>
-              <a:t>48</a:t>
+              <a:t>49</a:t>
             </a:fld>
             <a:endParaRPr lang="en-US"/>
           </a:p>
@@ -18420,9 +18917,9 @@
 </p:sld>
 </file>
 
-<file path=ppt/slides/slide49.xml><?xml version="1.0" encoding="utf-8"?>
+<file path=ppt/slides/slide5.xml><?xml version="1.0" encoding="utf-8"?>
 <p:sld xmlns:a="http://schemas.openxmlformats.org/drawingml/2006/main" xmlns:r="http://schemas.openxmlformats.org/officeDocument/2006/relationships" xmlns:p="http://schemas.openxmlformats.org/presentationml/2006/main">
-  <p:cSld name="Slide 49">
+  <p:cSld name="Slide 5">
     <p:spTree>
       <p:nvGrpSpPr>
         <p:cNvPr id="1" name=""/>
@@ -18470,6 +18967,225 @@
                 <a:ea typeface="Calibri" pitchFamily="34" charset="-122"/>
                 <a:cs typeface="Calibri" pitchFamily="34" charset="-120"/>
               </a:rPr>
+              <a:t>HOMEWORK CORRECTION</a:t>
+            </a:r>
+            <a:endParaRPr lang="en-US" sz="1400" dirty="0"/>
+          </a:p>
+        </p:txBody>
+      </p:sp>
+      <p:pic>
+        <p:nvPicPr>
+          <p:cNvPr id="3" name="Image 0" descr="/home/claude/f4/img/minesec_sheet.png">    </p:cNvPr>
+          <p:cNvPicPr>
+            <a:picLocks noChangeAspect="1"/>
+          </p:cNvPicPr>
+          <p:nvPr/>
+        </p:nvPicPr>
+        <p:blipFill>
+          <a:blip r:embed="rId1"/>
+          <a:stretch>
+            <a:fillRect/>
+          </a:stretch>
+        </p:blipFill>
+        <p:spPr>
+          <a:xfrm>
+            <a:off x="0" y="658368"/>
+            <a:ext cx="5120640" cy="5833872"/>
+          </a:xfrm>
+          <a:prstGeom prst="rect">
+            <a:avLst/>
+          </a:prstGeom>
+        </p:spPr>
+      </p:pic>
+      <p:sp>
+        <p:nvSpPr>
+          <p:cNvPr id="4" name="Text 1"/>
+          <p:cNvSpPr/>
+          <p:nvPr/>
+        </p:nvSpPr>
+        <p:spPr>
+          <a:xfrm>
+            <a:off x="5349240" y="1005840"/>
+            <a:ext cx="6522415" cy="731520"/>
+          </a:xfrm>
+          <a:prstGeom prst="rect">
+            <a:avLst/>
+          </a:prstGeom>
+          <a:noFill/>
+          <a:ln/>
+        </p:spPr>
+        <p:txBody>
+          <a:bodyPr wrap="square" lIns="0" tIns="0" rIns="0" bIns="0" rtlCol="0" anchor="ctr">
+            <a:normAutofit/>
+          </a:bodyPr>
+          <a:lstStyle/>
+          <a:p>
+            <a:pPr algn="ctr" indent="0" marL="0">
+              <a:buNone/>
+            </a:pPr>
+            <a:r>
+              <a:rPr lang="en-US" sz="3600" b="1" dirty="0">
+                <a:solidFill>
+                  <a:srgbClr val="990011"/>
+                </a:solidFill>
+                <a:latin typeface="Times New Roman" pitchFamily="34" charset="0"/>
+                <a:ea typeface="Times New Roman" pitchFamily="34" charset="-122"/>
+                <a:cs typeface="Times New Roman" pitchFamily="34" charset="-120"/>
+              </a:rPr>
+              <a:t>Correction: Possible Answer</a:t>
+            </a:r>
+            <a:endParaRPr lang="en-US" sz="3600" dirty="0"/>
+          </a:p>
+        </p:txBody>
+      </p:sp>
+      <p:sp>
+        <p:nvSpPr>
+          <p:cNvPr id="5" name="Text 2"/>
+          <p:cNvSpPr/>
+          <p:nvPr/>
+        </p:nvSpPr>
+        <p:spPr>
+          <a:xfrm>
+            <a:off x="5349240" y="1783080"/>
+            <a:ext cx="6522415" cy="4663440"/>
+          </a:xfrm>
+          <a:prstGeom prst="rect">
+            <a:avLst/>
+          </a:prstGeom>
+          <a:noFill/>
+          <a:ln/>
+        </p:spPr>
+        <p:txBody>
+          <a:bodyPr wrap="square" lIns="0" tIns="0" rIns="0" bIns="0" rtlCol="0" anchor="t"/>
+          <a:lstStyle/>
+          <a:p>
+            <a:pPr algn="l" indent="0" marL="0">
+              <a:spcAft>
+                <a:spcPts val="800"/>
+              </a:spcAft>
+              <a:buNone/>
+            </a:pPr>
+            <a:r>
+              <a:rPr lang="en-US" sz="4000" dirty="0">
+                <a:solidFill>
+                  <a:srgbClr val="111111"/>
+                </a:solidFill>
+                <a:latin typeface="Times New Roman" pitchFamily="34" charset="0"/>
+                <a:ea typeface="Times New Roman" pitchFamily="34" charset="-122"/>
+                <a:cs typeface="Times New Roman" pitchFamily="34" charset="-120"/>
+              </a:rPr>
+              <a:t>Cooking pot (aluminium from bauxite), nails (iron), electric wire (copper), cement walls (limestone), salt.</a:t>
+            </a:r>
+            <a:endParaRPr lang="en-US" sz="4000" dirty="0"/>
+          </a:p>
+        </p:txBody>
+      </p:sp>
+      <p:sp>
+        <p:nvSpPr>
+          <p:cNvPr id="25" name="Slide Number Placeholder 0"/>
+          <p:cNvSpPr>
+            <a:spLocks noGrp="1"/>
+          </p:cNvSpPr>
+          <p:nvPr>
+            <p:ph type="sldNum" sz="quarter" idx="4294967295"/>
+          </p:nvPr>
+        </p:nvSpPr>
+        <p:spPr>
+          <a:xfrm>
+            <a:off x="27432" y="91440"/>
+            <a:ext cx="585216" cy="475488"/>
+          </a:xfrm>
+          <a:prstGeom prst="rect">
+            <a:avLst/>
+          </a:prstGeom>
+          <a:extLst>
+            <a:ext uri="{C572A759-6A51-4108-AA02-DFA0A04FC94B}">
+              <ma14:wrappingTextBoxFlag xmlns:ma14="http://schemas.microsoft.com/office/mac/drawingml/2011/main" val="0"/>
+            </a:ext>
+          </a:extLst>
+        </p:spPr>
+        <p:txBody>
+          <a:bodyPr/>
+          <a:lstStyle>
+            <a:lvl1pPr>
+              <a:defRPr sz="2000">
+                <a:solidFill>
+                  <a:srgbClr val="FFFFFF"/>
+                </a:solidFill>
+                <a:latin typeface="Calibri"/>
+                <a:ea typeface="Calibri"/>
+                <a:cs typeface="Calibri"/>
+              </a:defRPr>
+            </a:lvl1pPr>
+          </a:lstStyle>
+          <a:p>
+            <a:pPr algn="ctr"/>
+            <a:fld id="{F7021451-1387-4CA6-816F-3879F97B5CBC}" type="slidenum">
+              <a:rPr b="1" lang="en-US"/>
+              <a:t>5</a:t>
+            </a:fld>
+            <a:endParaRPr lang="en-US"/>
+          </a:p>
+        </p:txBody>
+      </p:sp>
+    </p:spTree>
+  </p:cSld>
+  <p:clrMapOvr>
+    <a:masterClrMapping/>
+  </p:clrMapOvr>
+</p:sld>
+</file>
+
+<file path=ppt/slides/slide50.xml><?xml version="1.0" encoding="utf-8"?>
+<p:sld xmlns:a="http://schemas.openxmlformats.org/drawingml/2006/main" xmlns:r="http://schemas.openxmlformats.org/officeDocument/2006/relationships" xmlns:p="http://schemas.openxmlformats.org/presentationml/2006/main">
+  <p:cSld name="Slide 50">
+    <p:spTree>
+      <p:nvGrpSpPr>
+        <p:cNvPr id="1" name=""/>
+        <p:cNvGrpSpPr/>
+        <p:nvPr/>
+      </p:nvGrpSpPr>
+      <p:grpSpPr>
+        <a:xfrm>
+          <a:off x="0" y="0"/>
+          <a:ext cx="0" cy="0"/>
+          <a:chOff x="0" y="0"/>
+          <a:chExt cx="0" cy="0"/>
+        </a:xfrm>
+      </p:grpSpPr>
+      <p:sp>
+        <p:nvSpPr>
+          <p:cNvPr id="2" name="Text 0"/>
+          <p:cNvSpPr/>
+          <p:nvPr/>
+        </p:nvSpPr>
+        <p:spPr>
+          <a:xfrm>
+            <a:off x="457200" y="713232"/>
+            <a:ext cx="11368735" cy="274320"/>
+          </a:xfrm>
+          <a:prstGeom prst="rect">
+            <a:avLst/>
+          </a:prstGeom>
+          <a:noFill/>
+          <a:ln/>
+        </p:spPr>
+        <p:txBody>
+          <a:bodyPr wrap="square" lIns="0" tIns="0" rIns="0" bIns="0" rtlCol="0" anchor="ctr"/>
+          <a:lstStyle/>
+          <a:p>
+            <a:pPr algn="r" indent="0" marL="0">
+              <a:buNone/>
+            </a:pPr>
+            <a:r>
+              <a:rPr lang="en-US" sz="1400" b="1" dirty="0">
+                <a:solidFill>
+                  <a:srgbClr val="1C3F6E"/>
+                </a:solidFill>
+                <a:latin typeface="Calibri" pitchFamily="34" charset="0"/>
+                <a:ea typeface="Calibri" pitchFamily="34" charset="-122"/>
+                <a:cs typeface="Calibri" pitchFamily="34" charset="-120"/>
+              </a:rPr>
               <a:t>LOGBOOK</a:t>
             </a:r>
             <a:endParaRPr lang="en-US" sz="1400" dirty="0"/>
@@ -18517,7 +19233,7 @@
       </p:sp>
       <p:graphicFrame>
         <p:nvGraphicFramePr>
-          <p:cNvPr id="50" name="Table 0"/>
+          <p:cNvPr id="51" name="Table 0"/>
           <p:cNvGraphicFramePr>
             <a:graphicFrameLocks noGrp="1"/>
           </p:cNvGraphicFramePr>
@@ -18627,7 +19343,7 @@
                           <a:ea typeface="Calibri" pitchFamily="34" charset="-122"/>
                           <a:cs typeface="Calibri" pitchFamily="34" charset="-120"/>
                         </a:rPr>
-                        <a:t>Types and Distribution; Development and Importance; Government Efforts to Conserve.</a:t>
+                        <a:t>Types and Distribution; Efforts to Develop Minerals; Importance; Government Efforts to Conserve.</a:t>
                       </a:r>
                       <a:endParaRPr lang="en-US" sz="1600" dirty="0">
                         <a:latin typeface="Calibri" charset="0"/>
@@ -19277,550 +19993,6 @@
             <a:pPr algn="ctr"/>
             <a:fld id="{F7021451-1387-4CA6-816F-3879F97B5CBC}" type="slidenum">
               <a:rPr b="1" lang="en-US"/>
-              <a:t>49</a:t>
-            </a:fld>
-            <a:endParaRPr lang="en-US"/>
-          </a:p>
-        </p:txBody>
-      </p:sp>
-    </p:spTree>
-  </p:cSld>
-  <p:clrMapOvr>
-    <a:masterClrMapping/>
-  </p:clrMapOvr>
-</p:sld>
-</file>
-
-<file path=ppt/slides/slide5.xml><?xml version="1.0" encoding="utf-8"?>
-<p:sld xmlns:a="http://schemas.openxmlformats.org/drawingml/2006/main" xmlns:r="http://schemas.openxmlformats.org/officeDocument/2006/relationships" xmlns:p="http://schemas.openxmlformats.org/presentationml/2006/main">
-  <p:cSld name="Slide 5">
-    <p:spTree>
-      <p:nvGrpSpPr>
-        <p:cNvPr id="1" name=""/>
-        <p:cNvGrpSpPr/>
-        <p:nvPr/>
-      </p:nvGrpSpPr>
-      <p:grpSpPr>
-        <a:xfrm>
-          <a:off x="0" y="0"/>
-          <a:ext cx="0" cy="0"/>
-          <a:chOff x="0" y="0"/>
-          <a:chExt cx="0" cy="0"/>
-        </a:xfrm>
-      </p:grpSpPr>
-      <p:sp>
-        <p:nvSpPr>
-          <p:cNvPr id="2" name="Text 0"/>
-          <p:cNvSpPr/>
-          <p:nvPr/>
-        </p:nvSpPr>
-        <p:spPr>
-          <a:xfrm>
-            <a:off x="457200" y="713232"/>
-            <a:ext cx="11368735" cy="274320"/>
-          </a:xfrm>
-          <a:prstGeom prst="rect">
-            <a:avLst/>
-          </a:prstGeom>
-          <a:noFill/>
-          <a:ln/>
-        </p:spPr>
-        <p:txBody>
-          <a:bodyPr wrap="square" lIns="0" tIns="0" rIns="0" bIns="0" rtlCol="0" anchor="ctr"/>
-          <a:lstStyle/>
-          <a:p>
-            <a:pPr algn="r" indent="0" marL="0">
-              <a:buNone/>
-            </a:pPr>
-            <a:r>
-              <a:rPr lang="en-US" sz="1400" b="1" dirty="0">
-                <a:solidFill>
-                  <a:srgbClr val="1C3F6E"/>
-                </a:solidFill>
-                <a:latin typeface="Calibri" pitchFamily="34" charset="0"/>
-                <a:ea typeface="Calibri" pitchFamily="34" charset="-122"/>
-                <a:cs typeface="Calibri" pitchFamily="34" charset="-120"/>
-              </a:rPr>
-              <a:t>HOMEWORK CORRECTION</a:t>
-            </a:r>
-            <a:endParaRPr lang="en-US" sz="1400" dirty="0"/>
-          </a:p>
-        </p:txBody>
-      </p:sp>
-      <p:pic>
-        <p:nvPicPr>
-          <p:cNvPr id="3" name="Image 0" descr="/home/claude/f4/img/minesec_sheet.png">    </p:cNvPr>
-          <p:cNvPicPr>
-            <a:picLocks noChangeAspect="1"/>
-          </p:cNvPicPr>
-          <p:nvPr/>
-        </p:nvPicPr>
-        <p:blipFill>
-          <a:blip r:embed="rId1"/>
-          <a:stretch>
-            <a:fillRect/>
-          </a:stretch>
-        </p:blipFill>
-        <p:spPr>
-          <a:xfrm>
-            <a:off x="0" y="658368"/>
-            <a:ext cx="5120640" cy="5833872"/>
-          </a:xfrm>
-          <a:prstGeom prst="rect">
-            <a:avLst/>
-          </a:prstGeom>
-        </p:spPr>
-      </p:pic>
-      <p:sp>
-        <p:nvSpPr>
-          <p:cNvPr id="4" name="Text 1"/>
-          <p:cNvSpPr/>
-          <p:nvPr/>
-        </p:nvSpPr>
-        <p:spPr>
-          <a:xfrm>
-            <a:off x="5349240" y="1005840"/>
-            <a:ext cx="6522415" cy="731520"/>
-          </a:xfrm>
-          <a:prstGeom prst="rect">
-            <a:avLst/>
-          </a:prstGeom>
-          <a:noFill/>
-          <a:ln/>
-        </p:spPr>
-        <p:txBody>
-          <a:bodyPr wrap="square" lIns="0" tIns="0" rIns="0" bIns="0" rtlCol="0" anchor="ctr">
-            <a:normAutofit/>
-          </a:bodyPr>
-          <a:lstStyle/>
-          <a:p>
-            <a:pPr algn="ctr" indent="0" marL="0">
-              <a:buNone/>
-            </a:pPr>
-            <a:r>
-              <a:rPr lang="en-US" sz="3600" b="1" dirty="0">
-                <a:solidFill>
-                  <a:srgbClr val="990011"/>
-                </a:solidFill>
-                <a:latin typeface="Times New Roman" pitchFamily="34" charset="0"/>
-                <a:ea typeface="Times New Roman" pitchFamily="34" charset="-122"/>
-                <a:cs typeface="Times New Roman" pitchFamily="34" charset="-120"/>
-              </a:rPr>
-              <a:t>Correction: Possible Answer</a:t>
-            </a:r>
-            <a:endParaRPr lang="en-US" sz="3600" dirty="0"/>
-          </a:p>
-        </p:txBody>
-      </p:sp>
-      <p:sp>
-        <p:nvSpPr>
-          <p:cNvPr id="5" name="Text 2"/>
-          <p:cNvSpPr/>
-          <p:nvPr/>
-        </p:nvSpPr>
-        <p:spPr>
-          <a:xfrm>
-            <a:off x="5349240" y="1783080"/>
-            <a:ext cx="6522415" cy="4663440"/>
-          </a:xfrm>
-          <a:prstGeom prst="rect">
-            <a:avLst/>
-          </a:prstGeom>
-          <a:noFill/>
-          <a:ln/>
-        </p:spPr>
-        <p:txBody>
-          <a:bodyPr wrap="square" lIns="0" tIns="0" rIns="0" bIns="0" rtlCol="0" anchor="t"/>
-          <a:lstStyle/>
-          <a:p>
-            <a:pPr algn="l" indent="0" marL="0">
-              <a:spcAft>
-                <a:spcPts val="800"/>
-              </a:spcAft>
-              <a:buNone/>
-            </a:pPr>
-            <a:r>
-              <a:rPr lang="en-US" sz="4000" dirty="0">
-                <a:solidFill>
-                  <a:srgbClr val="111111"/>
-                </a:solidFill>
-                <a:latin typeface="Times New Roman" pitchFamily="34" charset="0"/>
-                <a:ea typeface="Times New Roman" pitchFamily="34" charset="-122"/>
-                <a:cs typeface="Times New Roman" pitchFamily="34" charset="-120"/>
-              </a:rPr>
-              <a:t>Cooking pot (aluminium from bauxite), nails (iron), electric wire (copper), cement walls (limestone), salt.</a:t>
-            </a:r>
-            <a:endParaRPr lang="en-US" sz="4000" dirty="0"/>
-          </a:p>
-        </p:txBody>
-      </p:sp>
-      <p:sp>
-        <p:nvSpPr>
-          <p:cNvPr id="25" name="Slide Number Placeholder 0"/>
-          <p:cNvSpPr>
-            <a:spLocks noGrp="1"/>
-          </p:cNvSpPr>
-          <p:nvPr>
-            <p:ph type="sldNum" sz="quarter" idx="4294967295"/>
-          </p:nvPr>
-        </p:nvSpPr>
-        <p:spPr>
-          <a:xfrm>
-            <a:off x="27432" y="91440"/>
-            <a:ext cx="585216" cy="475488"/>
-          </a:xfrm>
-          <a:prstGeom prst="rect">
-            <a:avLst/>
-          </a:prstGeom>
-          <a:extLst>
-            <a:ext uri="{C572A759-6A51-4108-AA02-DFA0A04FC94B}">
-              <ma14:wrappingTextBoxFlag xmlns:ma14="http://schemas.microsoft.com/office/mac/drawingml/2011/main" val="0"/>
-            </a:ext>
-          </a:extLst>
-        </p:spPr>
-        <p:txBody>
-          <a:bodyPr/>
-          <a:lstStyle>
-            <a:lvl1pPr>
-              <a:defRPr sz="2000">
-                <a:solidFill>
-                  <a:srgbClr val="FFFFFF"/>
-                </a:solidFill>
-                <a:latin typeface="Calibri"/>
-                <a:ea typeface="Calibri"/>
-                <a:cs typeface="Calibri"/>
-              </a:defRPr>
-            </a:lvl1pPr>
-          </a:lstStyle>
-          <a:p>
-            <a:pPr algn="ctr"/>
-            <a:fld id="{F7021451-1387-4CA6-816F-3879F97B5CBC}" type="slidenum">
-              <a:rPr b="1" lang="en-US"/>
-              <a:t>5</a:t>
-            </a:fld>
-            <a:endParaRPr lang="en-US"/>
-          </a:p>
-        </p:txBody>
-      </p:sp>
-    </p:spTree>
-  </p:cSld>
-  <p:clrMapOvr>
-    <a:masterClrMapping/>
-  </p:clrMapOvr>
-</p:sld>
-</file>
-
-<file path=ppt/slides/slide50.xml><?xml version="1.0" encoding="utf-8"?>
-<p:sld xmlns:a="http://schemas.openxmlformats.org/drawingml/2006/main" xmlns:r="http://schemas.openxmlformats.org/officeDocument/2006/relationships" xmlns:p="http://schemas.openxmlformats.org/presentationml/2006/main">
-  <p:cSld name="Slide 50">
-    <p:spTree>
-      <p:nvGrpSpPr>
-        <p:cNvPr id="1" name=""/>
-        <p:cNvGrpSpPr/>
-        <p:nvPr/>
-      </p:nvGrpSpPr>
-      <p:grpSpPr>
-        <a:xfrm>
-          <a:off x="0" y="0"/>
-          <a:ext cx="0" cy="0"/>
-          <a:chOff x="0" y="0"/>
-          <a:chExt cx="0" cy="0"/>
-        </a:xfrm>
-      </p:grpSpPr>
-      <p:sp>
-        <p:nvSpPr>
-          <p:cNvPr id="2" name="Text 0"/>
-          <p:cNvSpPr/>
-          <p:nvPr/>
-        </p:nvSpPr>
-        <p:spPr>
-          <a:xfrm>
-            <a:off x="457200" y="713232"/>
-            <a:ext cx="11368735" cy="274320"/>
-          </a:xfrm>
-          <a:prstGeom prst="rect">
-            <a:avLst/>
-          </a:prstGeom>
-          <a:noFill/>
-          <a:ln/>
-        </p:spPr>
-        <p:txBody>
-          <a:bodyPr wrap="square" lIns="0" tIns="0" rIns="0" bIns="0" rtlCol="0" anchor="ctr"/>
-          <a:lstStyle/>
-          <a:p>
-            <a:pPr algn="r" indent="0" marL="0">
-              <a:buNone/>
-            </a:pPr>
-            <a:r>
-              <a:rPr lang="en-US" sz="1400" b="1" dirty="0">
-                <a:solidFill>
-                  <a:srgbClr val="1C3F6E"/>
-                </a:solidFill>
-                <a:latin typeface="Calibri" pitchFamily="34" charset="0"/>
-                <a:ea typeface="Calibri" pitchFamily="34" charset="-122"/>
-                <a:cs typeface="Calibri" pitchFamily="34" charset="-120"/>
-              </a:rPr>
-              <a:t>TEACHER'S NOTE</a:t>
-            </a:r>
-            <a:endParaRPr lang="en-US" sz="1400" dirty="0"/>
-          </a:p>
-        </p:txBody>
-      </p:sp>
-      <p:pic>
-        <p:nvPicPr>
-          <p:cNvPr id="3" name="Image 0" descr="/home/claude/f4/img/minesec_sheet.png">    </p:cNvPr>
-          <p:cNvPicPr>
-            <a:picLocks noChangeAspect="1"/>
-          </p:cNvPicPr>
-          <p:nvPr/>
-        </p:nvPicPr>
-        <p:blipFill>
-          <a:blip r:embed="rId1"/>
-          <a:stretch>
-            <a:fillRect/>
-          </a:stretch>
-        </p:blipFill>
-        <p:spPr>
-          <a:xfrm>
-            <a:off x="0" y="658368"/>
-            <a:ext cx="5120640" cy="5833872"/>
-          </a:xfrm>
-          <a:prstGeom prst="rect">
-            <a:avLst/>
-          </a:prstGeom>
-        </p:spPr>
-      </p:pic>
-      <p:sp>
-        <p:nvSpPr>
-          <p:cNvPr id="4" name="Text 1"/>
-          <p:cNvSpPr/>
-          <p:nvPr/>
-        </p:nvSpPr>
-        <p:spPr>
-          <a:xfrm>
-            <a:off x="5349240" y="1005840"/>
-            <a:ext cx="6522415" cy="731520"/>
-          </a:xfrm>
-          <a:prstGeom prst="rect">
-            <a:avLst/>
-          </a:prstGeom>
-          <a:noFill/>
-          <a:ln/>
-        </p:spPr>
-        <p:txBody>
-          <a:bodyPr wrap="square" lIns="0" tIns="0" rIns="0" bIns="0" rtlCol="0" anchor="ctr">
-            <a:normAutofit/>
-          </a:bodyPr>
-          <a:lstStyle/>
-          <a:p>
-            <a:pPr algn="ctr" indent="0" marL="0">
-              <a:buNone/>
-            </a:pPr>
-            <a:r>
-              <a:rPr lang="en-US" sz="3600" b="1" dirty="0">
-                <a:solidFill>
-                  <a:srgbClr val="990011"/>
-                </a:solidFill>
-                <a:latin typeface="Times New Roman" pitchFamily="34" charset="0"/>
-                <a:ea typeface="Times New Roman" pitchFamily="34" charset="-122"/>
-                <a:cs typeface="Times New Roman" pitchFamily="34" charset="-120"/>
-              </a:rPr>
-              <a:t>Teacher's Note</a:t>
-            </a:r>
-            <a:endParaRPr lang="en-US" sz="3600" dirty="0"/>
-          </a:p>
-        </p:txBody>
-      </p:sp>
-      <p:sp>
-        <p:nvSpPr>
-          <p:cNvPr id="5" name="Text 2"/>
-          <p:cNvSpPr/>
-          <p:nvPr/>
-        </p:nvSpPr>
-        <p:spPr>
-          <a:xfrm>
-            <a:off x="5349240" y="1783080"/>
-            <a:ext cx="6522415" cy="4663440"/>
-          </a:xfrm>
-          <a:prstGeom prst="rect">
-            <a:avLst/>
-          </a:prstGeom>
-          <a:noFill/>
-          <a:ln/>
-        </p:spPr>
-        <p:txBody>
-          <a:bodyPr wrap="square" lIns="0" tIns="0" rIns="0" bIns="0" rtlCol="0" anchor="t"/>
-          <a:lstStyle/>
-          <a:p>
-            <a:pPr algn="l" marL="342900" indent="-342900">
-              <a:spcAft>
-                <a:spcPts val="800"/>
-              </a:spcAft>
-              <a:buSzPct val="100000"/>
-              <a:buChar char="•"/>
-            </a:pPr>
-            <a:r>
-              <a:rPr lang="en-US" sz="2000" dirty="0">
-                <a:solidFill>
-                  <a:srgbClr val="111111"/>
-                </a:solidFill>
-                <a:latin typeface="Calibri" pitchFamily="34" charset="0"/>
-                <a:ea typeface="Calibri" pitchFamily="34" charset="-122"/>
-                <a:cs typeface="Calibri" pitchFamily="34" charset="-120"/>
-              </a:rPr>
-              <a:t>Timing: Homework correction, plan, objectives 8 min | Recall, situation, action 10 min | 5 activities 30 min | Board summary (copying) 30 min | Evaluation, remediation 10 min | Homework, next lesson 5 min | Logbook 7 min</a:t>
-            </a:r>
-            <a:endParaRPr lang="en-US" sz="2000" dirty="0"/>
-          </a:p>
-          <a:p>
-            <a:pPr algn="l" marL="342900" indent="-342900">
-              <a:spcAft>
-                <a:spcPts val="800"/>
-              </a:spcAft>
-              <a:buSzPct val="100000"/>
-              <a:buChar char="•"/>
-            </a:pPr>
-            <a:r>
-              <a:rPr lang="en-US" sz="2000" dirty="0">
-                <a:solidFill>
-                  <a:srgbClr val="111111"/>
-                </a:solidFill>
-                <a:latin typeface="Calibri" pitchFamily="34" charset="0"/>
-                <a:ea typeface="Calibri" pitchFamily="34" charset="-122"/>
-                <a:cs typeface="Calibri" pitchFamily="34" charset="-120"/>
-              </a:rPr>
-              <a:t>Without the projector (Activity 1): use the map.</a:t>
-            </a:r>
-            <a:endParaRPr lang="en-US" sz="2000" dirty="0"/>
-          </a:p>
-          <a:p>
-            <a:pPr algn="l" marL="342900" indent="-342900">
-              <a:spcAft>
-                <a:spcPts val="800"/>
-              </a:spcAft>
-              <a:buSzPct val="100000"/>
-              <a:buChar char="•"/>
-            </a:pPr>
-            <a:r>
-              <a:rPr lang="en-US" sz="2000" dirty="0">
-                <a:solidFill>
-                  <a:srgbClr val="111111"/>
-                </a:solidFill>
-                <a:latin typeface="Calibri" pitchFamily="34" charset="0"/>
-                <a:ea typeface="Calibri" pitchFamily="34" charset="-122"/>
-                <a:cs typeface="Calibri" pitchFamily="34" charset="-120"/>
-              </a:rPr>
-              <a:t>Without the projector (Activity 2): discuss.</a:t>
-            </a:r>
-            <a:endParaRPr lang="en-US" sz="2000" dirty="0"/>
-          </a:p>
-          <a:p>
-            <a:pPr algn="l" marL="342900" indent="-342900">
-              <a:spcAft>
-                <a:spcPts val="800"/>
-              </a:spcAft>
-              <a:buSzPct val="100000"/>
-              <a:buChar char="•"/>
-            </a:pPr>
-            <a:r>
-              <a:rPr lang="en-US" sz="2000" dirty="0">
-                <a:solidFill>
-                  <a:srgbClr val="111111"/>
-                </a:solidFill>
-                <a:latin typeface="Calibri" pitchFamily="34" charset="0"/>
-                <a:ea typeface="Calibri" pitchFamily="34" charset="-122"/>
-                <a:cs typeface="Calibri" pitchFamily="34" charset="-120"/>
-              </a:rPr>
-              <a:t>Without the projector (Activity 3): discuss.</a:t>
-            </a:r>
-            <a:endParaRPr lang="en-US" sz="2000" dirty="0"/>
-          </a:p>
-          <a:p>
-            <a:pPr algn="l" marL="342900" indent="-342900">
-              <a:spcAft>
-                <a:spcPts val="800"/>
-              </a:spcAft>
-              <a:buSzPct val="100000"/>
-              <a:buChar char="•"/>
-            </a:pPr>
-            <a:r>
-              <a:rPr lang="en-US" sz="2000" dirty="0">
-                <a:solidFill>
-                  <a:srgbClr val="111111"/>
-                </a:solidFill>
-                <a:latin typeface="Calibri" pitchFamily="34" charset="0"/>
-                <a:ea typeface="Calibri" pitchFamily="34" charset="-122"/>
-                <a:cs typeface="Calibri" pitchFamily="34" charset="-120"/>
-              </a:rPr>
-              <a:t>Without the projector (Activity 4): discuss.</a:t>
-            </a:r>
-            <a:endParaRPr lang="en-US" sz="2000" dirty="0"/>
-          </a:p>
-          <a:p>
-            <a:pPr algn="l" marL="342900" indent="-342900">
-              <a:spcAft>
-                <a:spcPts val="800"/>
-              </a:spcAft>
-              <a:buSzPct val="100000"/>
-              <a:buChar char="•"/>
-            </a:pPr>
-            <a:r>
-              <a:rPr lang="en-US" sz="2000" dirty="0">
-                <a:solidFill>
-                  <a:srgbClr val="111111"/>
-                </a:solidFill>
-                <a:latin typeface="Calibri" pitchFamily="34" charset="0"/>
-                <a:ea typeface="Calibri" pitchFamily="34" charset="-122"/>
-                <a:cs typeface="Calibri" pitchFamily="34" charset="-120"/>
-              </a:rPr>
-              <a:t>Without the projector (Activity 5): discuss.</a:t>
-            </a:r>
-            <a:endParaRPr lang="en-US" sz="2000" dirty="0"/>
-          </a:p>
-        </p:txBody>
-      </p:sp>
-      <p:sp>
-        <p:nvSpPr>
-          <p:cNvPr id="25" name="Slide Number Placeholder 0"/>
-          <p:cNvSpPr>
-            <a:spLocks noGrp="1"/>
-          </p:cNvSpPr>
-          <p:nvPr>
-            <p:ph type="sldNum" sz="quarter" idx="4294967295"/>
-          </p:nvPr>
-        </p:nvSpPr>
-        <p:spPr>
-          <a:xfrm>
-            <a:off x="27432" y="91440"/>
-            <a:ext cx="585216" cy="475488"/>
-          </a:xfrm>
-          <a:prstGeom prst="rect">
-            <a:avLst/>
-          </a:prstGeom>
-          <a:extLst>
-            <a:ext uri="{C572A759-6A51-4108-AA02-DFA0A04FC94B}">
-              <ma14:wrappingTextBoxFlag xmlns:ma14="http://schemas.microsoft.com/office/mac/drawingml/2011/main" val="0"/>
-            </a:ext>
-          </a:extLst>
-        </p:spPr>
-        <p:txBody>
-          <a:bodyPr/>
-          <a:lstStyle>
-            <a:lvl1pPr>
-              <a:defRPr sz="2000">
-                <a:solidFill>
-                  <a:srgbClr val="FFFFFF"/>
-                </a:solidFill>
-                <a:latin typeface="Calibri"/>
-                <a:ea typeface="Calibri"/>
-                <a:cs typeface="Calibri"/>
-              </a:defRPr>
-            </a:lvl1pPr>
-          </a:lstStyle>
-          <a:p>
-            <a:pPr algn="ctr"/>
-            <a:fld id="{F7021451-1387-4CA6-816F-3879F97B5CBC}" type="slidenum">
-              <a:rPr b="1" lang="en-US"/>
               <a:t>50</a:t>
             </a:fld>
             <a:endParaRPr lang="en-US"/>
@@ -19885,7 +20057,7 @@
                 <a:ea typeface="Calibri" pitchFamily="34" charset="-122"/>
                 <a:cs typeface="Calibri" pitchFamily="34" charset="-120"/>
               </a:rPr>
-              <a:t>REFERENCES</a:t>
+              <a:t>TEACHER'S NOTE</a:t>
             </a:r>
             <a:endParaRPr lang="en-US" sz="1400" dirty="0"/>
           </a:p>
@@ -19908,7 +20080,7 @@
         <p:spPr>
           <a:xfrm>
             <a:off x="0" y="658368"/>
-            <a:ext cx="3840480" cy="5833872"/>
+            <a:ext cx="5120640" cy="5833872"/>
           </a:xfrm>
           <a:prstGeom prst="rect">
             <a:avLst/>
@@ -19923,8 +20095,8 @@
         </p:nvSpPr>
         <p:spPr>
           <a:xfrm>
-            <a:off x="4069080" y="1005840"/>
-            <a:ext cx="7802575" cy="731520"/>
+            <a:off x="5349240" y="1005840"/>
+            <a:ext cx="6522415" cy="731520"/>
           </a:xfrm>
           <a:prstGeom prst="rect">
             <a:avLst/>
@@ -19950,7 +20122,7 @@
                 <a:ea typeface="Times New Roman" pitchFamily="34" charset="-122"/>
                 <a:cs typeface="Times New Roman" pitchFamily="34" charset="-120"/>
               </a:rPr>
-              <a:t>References</a:t>
+              <a:t>Teacher's Note</a:t>
             </a:r>
             <a:endParaRPr lang="en-US" sz="3600" dirty="0"/>
           </a:p>
@@ -19964,8 +20136,8 @@
         </p:nvSpPr>
         <p:spPr>
           <a:xfrm>
-            <a:off x="4069080" y="1783080"/>
-            <a:ext cx="7802575" cy="4663440"/>
+            <a:off x="5349240" y="1783080"/>
+            <a:ext cx="6522415" cy="4663440"/>
           </a:xfrm>
           <a:prstGeom prst="rect">
             <a:avLst/>
@@ -19985,7 +20157,7 @@
               <a:buChar char="•"/>
             </a:pPr>
             <a:r>
-              <a:rPr lang="en-US" sz="1800" dirty="0">
+              <a:rPr lang="en-US" sz="2000" dirty="0">
                 <a:solidFill>
                   <a:srgbClr val="111111"/>
                 </a:solidFill>
@@ -19993,9 +20165,9 @@
                 <a:ea typeface="Calibri" pitchFamily="34" charset="-122"/>
                 <a:cs typeface="Calibri" pitchFamily="34" charset="-120"/>
               </a:rPr>
-              <a:t>Geography Syllabus, Forms I–V, MINESEC (2023) — Form 4, Module II: Development and the Management of Primary Resources.</a:t>
-            </a:r>
-            <a:endParaRPr lang="en-US" sz="1800" dirty="0"/>
+              <a:t>Timing: Homework correction, plan, objectives 8 min | Recall, situation, action 10 min | 5 activities 30 min | Board summary (copying) 30 min | Evaluation, remediation 10 min | Homework, next lesson 5 min | Logbook 7 min</a:t>
+            </a:r>
+            <a:endParaRPr lang="en-US" sz="2000" dirty="0"/>
           </a:p>
           <a:p>
             <a:pPr algn="l" marL="342900" indent="-342900">
@@ -20006,7 +20178,7 @@
               <a:buChar char="•"/>
             </a:pPr>
             <a:r>
-              <a:rPr lang="en-US" sz="1800" dirty="0">
+              <a:rPr lang="en-US" sz="2000" dirty="0">
                 <a:solidFill>
                   <a:srgbClr val="111111"/>
                 </a:solidFill>
@@ -20014,9 +20186,9 @@
                 <a:ea typeface="Calibri" pitchFamily="34" charset="-122"/>
                 <a:cs typeface="Calibri" pitchFamily="34" charset="-120"/>
               </a:rPr>
-              <a:t>Photo, Activity 2: “Mining in Kailo” by Julien Harneis, CC BY-SA 2.0, via Flickr (https://www.flickr.com/photos/16935515@N00/1873057946)</a:t>
-            </a:r>
-            <a:endParaRPr lang="en-US" sz="1800" dirty="0"/>
+              <a:t>Without the projector (Activity 1): use the map.</a:t>
+            </a:r>
+            <a:endParaRPr lang="en-US" sz="2000" dirty="0"/>
           </a:p>
           <a:p>
             <a:pPr algn="l" marL="342900" indent="-342900">
@@ -20027,7 +20199,7 @@
               <a:buChar char="•"/>
             </a:pPr>
             <a:r>
-              <a:rPr lang="en-US" sz="1800" dirty="0">
+              <a:rPr lang="en-US" sz="2000" dirty="0">
                 <a:solidFill>
                   <a:srgbClr val="111111"/>
                 </a:solidFill>
@@ -20035,9 +20207,9 @@
                 <a:ea typeface="Calibri" pitchFamily="34" charset="-122"/>
                 <a:cs typeface="Calibri" pitchFamily="34" charset="-120"/>
               </a:rPr>
-              <a:t>Photo, Activity 3: “Bauxite mine near Itea, Greece” by Jason-Morrison, CC BY-NC 2.0, via Flickr (https://www.flickr.com/photos/8998833@N07/929316608)</a:t>
-            </a:r>
-            <a:endParaRPr lang="en-US" sz="1800" dirty="0"/>
+              <a:t>Without the projector (Activity 2): discuss.</a:t>
+            </a:r>
+            <a:endParaRPr lang="en-US" sz="2000" dirty="0"/>
           </a:p>
           <a:p>
             <a:pPr algn="l" marL="342900" indent="-342900">
@@ -20048,7 +20220,7 @@
               <a:buChar char="•"/>
             </a:pPr>
             <a:r>
-              <a:rPr lang="en-US" sz="1800" dirty="0">
+              <a:rPr lang="en-US" sz="2000" dirty="0">
                 <a:solidFill>
                   <a:srgbClr val="111111"/>
                 </a:solidFill>
@@ -20056,9 +20228,9 @@
                 <a:ea typeface="Calibri" pitchFamily="34" charset="-122"/>
                 <a:cs typeface="Calibri" pitchFamily="34" charset="-120"/>
               </a:rPr>
-              <a:t>Photo, Activity 4: “Oil Pump Jack” by Paul Lowry, CC BY 2.0, via Flickr (https://www.flickr.com/photos/10039026@N03/2770193028)</a:t>
-            </a:r>
-            <a:endParaRPr lang="en-US" sz="1800" dirty="0"/>
+              <a:t>Without the projector (Activity 3): discuss.</a:t>
+            </a:r>
+            <a:endParaRPr lang="en-US" sz="2000" dirty="0"/>
           </a:p>
           <a:p>
             <a:pPr algn="l" marL="342900" indent="-342900">
@@ -20069,7 +20241,7 @@
               <a:buChar char="•"/>
             </a:pPr>
             <a:r>
-              <a:rPr lang="en-US" sz="1800" dirty="0">
+              <a:rPr lang="en-US" sz="2000" dirty="0">
                 <a:solidFill>
                   <a:srgbClr val="111111"/>
                 </a:solidFill>
@@ -20077,9 +20249,9 @@
                 <a:ea typeface="Calibri" pitchFamily="34" charset="-122"/>
                 <a:cs typeface="Calibri" pitchFamily="34" charset="-120"/>
               </a:rPr>
-              <a:t>Photo, Activity 5: “Hillsides scarred by landslides caused by cloudbursts, Rudraprayag, Ut” by ICIMOD.Gallery, CC BY-NC 2.0, via Flickr (https://www.flickr.com/photos/127267759@N06/16051008426)</a:t>
-            </a:r>
-            <a:endParaRPr lang="en-US" sz="1800" dirty="0"/>
+              <a:t>Without the projector (Activity 4): discuss.</a:t>
+            </a:r>
+            <a:endParaRPr lang="en-US" sz="2000" dirty="0"/>
           </a:p>
           <a:p>
             <a:pPr algn="l" marL="342900" indent="-342900">
@@ -20090,7 +20262,7 @@
               <a:buChar char="•"/>
             </a:pPr>
             <a:r>
-              <a:rPr lang="en-US" sz="1800" dirty="0">
+              <a:rPr lang="en-US" sz="2000" dirty="0">
                 <a:solidFill>
                   <a:srgbClr val="111111"/>
                 </a:solidFill>
@@ -20098,9 +20270,9 @@
                 <a:ea typeface="Calibri" pitchFamily="34" charset="-122"/>
                 <a:cs typeface="Calibri" pitchFamily="34" charset="-120"/>
               </a:rPr>
-              <a:t>Diagrams and animations: drawn for this lesson (Geography Department).</a:t>
-            </a:r>
-            <a:endParaRPr lang="en-US" sz="1800" dirty="0"/>
+              <a:t>Without the projector (Activity 5): discuss.</a:t>
+            </a:r>
+            <a:endParaRPr lang="en-US" sz="2000" dirty="0"/>
           </a:p>
         </p:txBody>
       </p:sp>
@@ -20147,6 +20319,331 @@
             <a:fld id="{F7021451-1387-4CA6-816F-3879F97B5CBC}" type="slidenum">
               <a:rPr b="1" lang="en-US"/>
               <a:t>51</a:t>
+            </a:fld>
+            <a:endParaRPr lang="en-US"/>
+          </a:p>
+        </p:txBody>
+      </p:sp>
+    </p:spTree>
+  </p:cSld>
+  <p:clrMapOvr>
+    <a:masterClrMapping/>
+  </p:clrMapOvr>
+</p:sld>
+</file>
+
+<file path=ppt/slides/slide52.xml><?xml version="1.0" encoding="utf-8"?>
+<p:sld xmlns:a="http://schemas.openxmlformats.org/drawingml/2006/main" xmlns:r="http://schemas.openxmlformats.org/officeDocument/2006/relationships" xmlns:p="http://schemas.openxmlformats.org/presentationml/2006/main">
+  <p:cSld name="Slide 52">
+    <p:spTree>
+      <p:nvGrpSpPr>
+        <p:cNvPr id="1" name=""/>
+        <p:cNvGrpSpPr/>
+        <p:nvPr/>
+      </p:nvGrpSpPr>
+      <p:grpSpPr>
+        <a:xfrm>
+          <a:off x="0" y="0"/>
+          <a:ext cx="0" cy="0"/>
+          <a:chOff x="0" y="0"/>
+          <a:chExt cx="0" cy="0"/>
+        </a:xfrm>
+      </p:grpSpPr>
+      <p:sp>
+        <p:nvSpPr>
+          <p:cNvPr id="2" name="Text 0"/>
+          <p:cNvSpPr/>
+          <p:nvPr/>
+        </p:nvSpPr>
+        <p:spPr>
+          <a:xfrm>
+            <a:off x="457200" y="713232"/>
+            <a:ext cx="11368735" cy="274320"/>
+          </a:xfrm>
+          <a:prstGeom prst="rect">
+            <a:avLst/>
+          </a:prstGeom>
+          <a:noFill/>
+          <a:ln/>
+        </p:spPr>
+        <p:txBody>
+          <a:bodyPr wrap="square" lIns="0" tIns="0" rIns="0" bIns="0" rtlCol="0" anchor="ctr"/>
+          <a:lstStyle/>
+          <a:p>
+            <a:pPr algn="r" indent="0" marL="0">
+              <a:buNone/>
+            </a:pPr>
+            <a:r>
+              <a:rPr lang="en-US" sz="1400" b="1" dirty="0">
+                <a:solidFill>
+                  <a:srgbClr val="1C3F6E"/>
+                </a:solidFill>
+                <a:latin typeface="Calibri" pitchFamily="34" charset="0"/>
+                <a:ea typeface="Calibri" pitchFamily="34" charset="-122"/>
+                <a:cs typeface="Calibri" pitchFamily="34" charset="-120"/>
+              </a:rPr>
+              <a:t>REFERENCES</a:t>
+            </a:r>
+            <a:endParaRPr lang="en-US" sz="1400" dirty="0"/>
+          </a:p>
+        </p:txBody>
+      </p:sp>
+      <p:pic>
+        <p:nvPicPr>
+          <p:cNvPr id="3" name="Image 0" descr="/home/claude/f4/img/minesec_sheet.png">    </p:cNvPr>
+          <p:cNvPicPr>
+            <a:picLocks noChangeAspect="1"/>
+          </p:cNvPicPr>
+          <p:nvPr/>
+        </p:nvPicPr>
+        <p:blipFill>
+          <a:blip r:embed="rId1"/>
+          <a:stretch>
+            <a:fillRect/>
+          </a:stretch>
+        </p:blipFill>
+        <p:spPr>
+          <a:xfrm>
+            <a:off x="0" y="658368"/>
+            <a:ext cx="3840480" cy="5833872"/>
+          </a:xfrm>
+          <a:prstGeom prst="rect">
+            <a:avLst/>
+          </a:prstGeom>
+        </p:spPr>
+      </p:pic>
+      <p:sp>
+        <p:nvSpPr>
+          <p:cNvPr id="4" name="Text 1"/>
+          <p:cNvSpPr/>
+          <p:nvPr/>
+        </p:nvSpPr>
+        <p:spPr>
+          <a:xfrm>
+            <a:off x="4069080" y="1005840"/>
+            <a:ext cx="7802575" cy="731520"/>
+          </a:xfrm>
+          <a:prstGeom prst="rect">
+            <a:avLst/>
+          </a:prstGeom>
+          <a:noFill/>
+          <a:ln/>
+        </p:spPr>
+        <p:txBody>
+          <a:bodyPr wrap="square" lIns="0" tIns="0" rIns="0" bIns="0" rtlCol="0" anchor="ctr">
+            <a:normAutofit/>
+          </a:bodyPr>
+          <a:lstStyle/>
+          <a:p>
+            <a:pPr algn="ctr" indent="0" marL="0">
+              <a:buNone/>
+            </a:pPr>
+            <a:r>
+              <a:rPr lang="en-US" sz="3600" b="1" dirty="0">
+                <a:solidFill>
+                  <a:srgbClr val="990011"/>
+                </a:solidFill>
+                <a:latin typeface="Times New Roman" pitchFamily="34" charset="0"/>
+                <a:ea typeface="Times New Roman" pitchFamily="34" charset="-122"/>
+                <a:cs typeface="Times New Roman" pitchFamily="34" charset="-120"/>
+              </a:rPr>
+              <a:t>References</a:t>
+            </a:r>
+            <a:endParaRPr lang="en-US" sz="3600" dirty="0"/>
+          </a:p>
+        </p:txBody>
+      </p:sp>
+      <p:sp>
+        <p:nvSpPr>
+          <p:cNvPr id="5" name="Text 2"/>
+          <p:cNvSpPr/>
+          <p:nvPr/>
+        </p:nvSpPr>
+        <p:spPr>
+          <a:xfrm>
+            <a:off x="4069080" y="1783080"/>
+            <a:ext cx="7802575" cy="4663440"/>
+          </a:xfrm>
+          <a:prstGeom prst="rect">
+            <a:avLst/>
+          </a:prstGeom>
+          <a:noFill/>
+          <a:ln/>
+        </p:spPr>
+        <p:txBody>
+          <a:bodyPr wrap="square" lIns="0" tIns="0" rIns="0" bIns="0" rtlCol="0" anchor="t"/>
+          <a:lstStyle/>
+          <a:p>
+            <a:pPr algn="l" marL="342900" indent="-342900">
+              <a:spcAft>
+                <a:spcPts val="800"/>
+              </a:spcAft>
+              <a:buSzPct val="100000"/>
+              <a:buChar char="•"/>
+            </a:pPr>
+            <a:r>
+              <a:rPr lang="en-US" sz="1800" dirty="0">
+                <a:solidFill>
+                  <a:srgbClr val="111111"/>
+                </a:solidFill>
+                <a:latin typeface="Calibri" pitchFamily="34" charset="0"/>
+                <a:ea typeface="Calibri" pitchFamily="34" charset="-122"/>
+                <a:cs typeface="Calibri" pitchFamily="34" charset="-120"/>
+              </a:rPr>
+              <a:t>Geography Syllabus, Forms I–V, MINESEC (2023) — Form 4, Module II: Development and the Management of Primary Resources.</a:t>
+            </a:r>
+            <a:endParaRPr lang="en-US" sz="1800" dirty="0"/>
+          </a:p>
+          <a:p>
+            <a:pPr algn="l" marL="342900" indent="-342900">
+              <a:spcAft>
+                <a:spcPts val="800"/>
+              </a:spcAft>
+              <a:buSzPct val="100000"/>
+              <a:buChar char="•"/>
+            </a:pPr>
+            <a:r>
+              <a:rPr lang="en-US" sz="1800" dirty="0">
+                <a:solidFill>
+                  <a:srgbClr val="111111"/>
+                </a:solidFill>
+                <a:latin typeface="Calibri" pitchFamily="34" charset="0"/>
+                <a:ea typeface="Calibri" pitchFamily="34" charset="-122"/>
+                <a:cs typeface="Calibri" pitchFamily="34" charset="-120"/>
+              </a:rPr>
+              <a:t>Photo, Activity 2: “Mining in Kailo” by Julien Harneis, CC BY-SA 2.0, via Flickr (https://www.flickr.com/photos/16935515@N00/1873057946)</a:t>
+            </a:r>
+            <a:endParaRPr lang="en-US" sz="1800" dirty="0"/>
+          </a:p>
+          <a:p>
+            <a:pPr algn="l" marL="342900" indent="-342900">
+              <a:spcAft>
+                <a:spcPts val="800"/>
+              </a:spcAft>
+              <a:buSzPct val="100000"/>
+              <a:buChar char="•"/>
+            </a:pPr>
+            <a:r>
+              <a:rPr lang="en-US" sz="1800" dirty="0">
+                <a:solidFill>
+                  <a:srgbClr val="111111"/>
+                </a:solidFill>
+                <a:latin typeface="Calibri" pitchFamily="34" charset="0"/>
+                <a:ea typeface="Calibri" pitchFamily="34" charset="-122"/>
+                <a:cs typeface="Calibri" pitchFamily="34" charset="-120"/>
+              </a:rPr>
+              <a:t>Photo, Activity 3: “Bauxite mine near Itea, Greece” by Jason-Morrison, CC BY-NC 2.0, via Flickr (https://www.flickr.com/photos/8998833@N07/929316608)</a:t>
+            </a:r>
+            <a:endParaRPr lang="en-US" sz="1800" dirty="0"/>
+          </a:p>
+          <a:p>
+            <a:pPr algn="l" marL="342900" indent="-342900">
+              <a:spcAft>
+                <a:spcPts val="800"/>
+              </a:spcAft>
+              <a:buSzPct val="100000"/>
+              <a:buChar char="•"/>
+            </a:pPr>
+            <a:r>
+              <a:rPr lang="en-US" sz="1800" dirty="0">
+                <a:solidFill>
+                  <a:srgbClr val="111111"/>
+                </a:solidFill>
+                <a:latin typeface="Calibri" pitchFamily="34" charset="0"/>
+                <a:ea typeface="Calibri" pitchFamily="34" charset="-122"/>
+                <a:cs typeface="Calibri" pitchFamily="34" charset="-120"/>
+              </a:rPr>
+              <a:t>Photo, Activity 4: “Oil Pump Jack” by Paul Lowry, CC BY 2.0, via Flickr (https://www.flickr.com/photos/10039026@N03/2770193028)</a:t>
+            </a:r>
+            <a:endParaRPr lang="en-US" sz="1800" dirty="0"/>
+          </a:p>
+          <a:p>
+            <a:pPr algn="l" marL="342900" indent="-342900">
+              <a:spcAft>
+                <a:spcPts val="800"/>
+              </a:spcAft>
+              <a:buSzPct val="100000"/>
+              <a:buChar char="•"/>
+            </a:pPr>
+            <a:r>
+              <a:rPr lang="en-US" sz="1800" dirty="0">
+                <a:solidFill>
+                  <a:srgbClr val="111111"/>
+                </a:solidFill>
+                <a:latin typeface="Calibri" pitchFamily="34" charset="0"/>
+                <a:ea typeface="Calibri" pitchFamily="34" charset="-122"/>
+                <a:cs typeface="Calibri" pitchFamily="34" charset="-120"/>
+              </a:rPr>
+              <a:t>Photo, Activity 5: “Hillsides scarred by landslides caused by cloudbursts, Rudraprayag, Ut” by ICIMOD.Gallery, CC BY-NC 2.0, via Flickr (https://www.flickr.com/photos/127267759@N06/16051008426)</a:t>
+            </a:r>
+            <a:endParaRPr lang="en-US" sz="1800" dirty="0"/>
+          </a:p>
+          <a:p>
+            <a:pPr algn="l" marL="342900" indent="-342900">
+              <a:spcAft>
+                <a:spcPts val="800"/>
+              </a:spcAft>
+              <a:buSzPct val="100000"/>
+              <a:buChar char="•"/>
+            </a:pPr>
+            <a:r>
+              <a:rPr lang="en-US" sz="1800" dirty="0">
+                <a:solidFill>
+                  <a:srgbClr val="111111"/>
+                </a:solidFill>
+                <a:latin typeface="Calibri" pitchFamily="34" charset="0"/>
+                <a:ea typeface="Calibri" pitchFamily="34" charset="-122"/>
+                <a:cs typeface="Calibri" pitchFamily="34" charset="-120"/>
+              </a:rPr>
+              <a:t>Diagrams and animations: drawn for this lesson (Geography Department).</a:t>
+            </a:r>
+            <a:endParaRPr lang="en-US" sz="1800" dirty="0"/>
+          </a:p>
+        </p:txBody>
+      </p:sp>
+      <p:sp>
+        <p:nvSpPr>
+          <p:cNvPr id="25" name="Slide Number Placeholder 0"/>
+          <p:cNvSpPr>
+            <a:spLocks noGrp="1"/>
+          </p:cNvSpPr>
+          <p:nvPr>
+            <p:ph type="sldNum" sz="quarter" idx="4294967295"/>
+          </p:nvPr>
+        </p:nvSpPr>
+        <p:spPr>
+          <a:xfrm>
+            <a:off x="27432" y="91440"/>
+            <a:ext cx="585216" cy="475488"/>
+          </a:xfrm>
+          <a:prstGeom prst="rect">
+            <a:avLst/>
+          </a:prstGeom>
+          <a:extLst>
+            <a:ext uri="{C572A759-6A51-4108-AA02-DFA0A04FC94B}">
+              <ma14:wrappingTextBoxFlag xmlns:ma14="http://schemas.microsoft.com/office/mac/drawingml/2011/main" val="0"/>
+            </a:ext>
+          </a:extLst>
+        </p:spPr>
+        <p:txBody>
+          <a:bodyPr/>
+          <a:lstStyle>
+            <a:lvl1pPr>
+              <a:defRPr sz="2000">
+                <a:solidFill>
+                  <a:srgbClr val="FFFFFF"/>
+                </a:solidFill>
+                <a:latin typeface="Calibri"/>
+                <a:ea typeface="Calibri"/>
+                <a:cs typeface="Calibri"/>
+              </a:defRPr>
+            </a:lvl1pPr>
+          </a:lstStyle>
+          <a:p>
+            <a:pPr algn="ctr"/>
+            <a:fld id="{F7021451-1387-4CA6-816F-3879F97B5CBC}" type="slidenum">
+              <a:rPr b="1" lang="en-US"/>
+              <a:t>52</a:t>
             </a:fld>
             <a:endParaRPr lang="en-US"/>
           </a:p>
